--- a/Mapped Curriculum Lessons/Grade 7/Lesson 13 - String Positions/String Positions - Slides.pptx
+++ b/Mapped Curriculum Lessons/Grade 7/Lesson 13 - String Positions/String Positions - Slides.pptx
@@ -2,28 +2,28 @@
 <file path=ppt/presentation.xml><?xml version="1.0" encoding="utf-8"?>
 <p:presentation xmlns:p="http://schemas.openxmlformats.org/presentationml/2006/main" embedTrueTypeFonts="1" saveSubsetFonts="0">
   <p:sldMasterIdLst>
-    <p:sldMasterId xmlns:r="http://schemas.openxmlformats.org/officeDocument/2006/relationships" id="2147483648" r:id="R206e47bfd63e4e73"/>
+    <p:sldMasterId xmlns:r="http://schemas.openxmlformats.org/officeDocument/2006/relationships" id="2147483648" r:id="R630cf498e0024042"/>
   </p:sldMasterIdLst>
   <p:notesMasterIdLst>
-    <p:notesMasterId xmlns:r="http://schemas.openxmlformats.org/officeDocument/2006/relationships" r:id="Rc19c973e3a6e419c"/>
+    <p:notesMasterId xmlns:r="http://schemas.openxmlformats.org/officeDocument/2006/relationships" r:id="R88a35bef40674d13"/>
   </p:notesMasterIdLst>
   <p:sldIdLst>
-    <p:sldId xmlns:r="http://schemas.openxmlformats.org/officeDocument/2006/relationships" id="256" r:id="R394a0780e12a45f0"/>
-    <p:sldId xmlns:r="http://schemas.openxmlformats.org/officeDocument/2006/relationships" id="257" r:id="R72b6d8e817764fa6"/>
-    <p:sldId xmlns:r="http://schemas.openxmlformats.org/officeDocument/2006/relationships" id="258" r:id="R31304b7c15e44dea"/>
-    <p:sldId xmlns:r="http://schemas.openxmlformats.org/officeDocument/2006/relationships" id="259" r:id="Rc5b3bb47566644ba"/>
-    <p:sldId xmlns:r="http://schemas.openxmlformats.org/officeDocument/2006/relationships" id="260" r:id="Rd0cf8034fce44a5d"/>
-    <p:sldId xmlns:r="http://schemas.openxmlformats.org/officeDocument/2006/relationships" id="261" r:id="R3313d449c22b4a59"/>
-    <p:sldId xmlns:r="http://schemas.openxmlformats.org/officeDocument/2006/relationships" id="262" r:id="Rd9d9e3d0a6b442c0"/>
-    <p:sldId xmlns:r="http://schemas.openxmlformats.org/officeDocument/2006/relationships" id="263" r:id="R6313cc483db34032"/>
-    <p:sldId xmlns:r="http://schemas.openxmlformats.org/officeDocument/2006/relationships" id="264" r:id="Rcab8d2878897443d"/>
+    <p:sldId xmlns:r="http://schemas.openxmlformats.org/officeDocument/2006/relationships" id="256" r:id="R0bda2d89b2664ad6"/>
+    <p:sldId xmlns:r="http://schemas.openxmlformats.org/officeDocument/2006/relationships" id="257" r:id="Rfa93e7f55e554c61"/>
+    <p:sldId xmlns:r="http://schemas.openxmlformats.org/officeDocument/2006/relationships" id="258" r:id="R958953c134f54ece"/>
+    <p:sldId xmlns:r="http://schemas.openxmlformats.org/officeDocument/2006/relationships" id="259" r:id="R234a8c7588224566"/>
+    <p:sldId xmlns:r="http://schemas.openxmlformats.org/officeDocument/2006/relationships" id="260" r:id="Rc183c7cbd570404e"/>
+    <p:sldId xmlns:r="http://schemas.openxmlformats.org/officeDocument/2006/relationships" id="261" r:id="R8a916504eb0c46a0"/>
+    <p:sldId xmlns:r="http://schemas.openxmlformats.org/officeDocument/2006/relationships" id="262" r:id="R7067c3ed096848ff"/>
+    <p:sldId xmlns:r="http://schemas.openxmlformats.org/officeDocument/2006/relationships" id="263" r:id="R3d52f3b1d1ba45e3"/>
+    <p:sldId xmlns:r="http://schemas.openxmlformats.org/officeDocument/2006/relationships" id="264" r:id="R9ade3c85b35f46b8"/>
   </p:sldIdLst>
   <p:sldSz cx="12192000" cy="6858000"/>
   <p:notesSz cx="6858000" cy="9144000"/>
   <p:embeddedFontLst>
     <p:embeddedFont>
       <p:font typeface="JetBrains Mono"/>
-      <p:regular xmlns:r="http://schemas.openxmlformats.org/officeDocument/2006/relationships" r:id="R4ab4f5c6009a4b2f"/>
+      <p:regular xmlns:r="http://schemas.openxmlformats.org/officeDocument/2006/relationships" r:id="R2d1a09d6874540da"/>
     </p:embeddedFont>
   </p:embeddedFontLst>
 </p:presentation>
@@ -1071,7 +1071,7 @@
           <p:nvPr/>
         </p:nvPicPr>
         <p:blipFill rotWithShape="1">
-          <a:blip xmlns:r="http://schemas.openxmlformats.org/officeDocument/2006/relationships" xmlns:a="http://schemas.openxmlformats.org/drawingml/2006/main" r:embed="Rc8745ccf21f7443e"/>
+          <a:blip xmlns:r="http://schemas.openxmlformats.org/officeDocument/2006/relationships" xmlns:a="http://schemas.openxmlformats.org/drawingml/2006/main" r:embed="Rfac01a7902b64bd2"/>
           <a:stretch xmlns:a="http://schemas.openxmlformats.org/drawingml/2006/main"/>
         </p:blipFill>
         <p:spPr>
@@ -1451,7 +1451,7 @@
           <p:nvPr/>
         </p:nvPicPr>
         <p:blipFill rotWithShape="1">
-          <a:blip xmlns:r="http://schemas.openxmlformats.org/officeDocument/2006/relationships" xmlns:a="http://schemas.openxmlformats.org/drawingml/2006/main" r:embed="R8aaf16bf2e9442bd">
+          <a:blip xmlns:r="http://schemas.openxmlformats.org/officeDocument/2006/relationships" xmlns:a="http://schemas.openxmlformats.org/drawingml/2006/main" r:embed="R2e916359a31c4b77">
             <a:alphaModFix amt="28000"/>
           </a:blip>
           <a:stretch xmlns:a="http://schemas.openxmlformats.org/drawingml/2006/main"/>
@@ -1664,7 +1664,7 @@
           <p:nvPr/>
         </p:nvPicPr>
         <p:blipFill rotWithShape="1">
-          <a:blip xmlns:r="http://schemas.openxmlformats.org/officeDocument/2006/relationships" xmlns:a="http://schemas.openxmlformats.org/drawingml/2006/main" r:embed="R0a0bbf189f0a47e7">
+          <a:blip xmlns:r="http://schemas.openxmlformats.org/officeDocument/2006/relationships" xmlns:a="http://schemas.openxmlformats.org/drawingml/2006/main" r:embed="R4d090523299e4bd6">
             <a:alphaModFix amt="28000"/>
           </a:blip>
           <a:stretch xmlns:a="http://schemas.openxmlformats.org/drawingml/2006/main"/>
@@ -1899,7 +1899,7 @@
           <p:nvPr/>
         </p:nvPicPr>
         <p:blipFill rotWithShape="1">
-          <a:blip xmlns:r="http://schemas.openxmlformats.org/officeDocument/2006/relationships" xmlns:a="http://schemas.openxmlformats.org/drawingml/2006/main" r:embed="R0acb2b440de4430e">
+          <a:blip xmlns:r="http://schemas.openxmlformats.org/officeDocument/2006/relationships" xmlns:a="http://schemas.openxmlformats.org/drawingml/2006/main" r:embed="R8e56b84a86844429">
             <a:alphaModFix amt="28000"/>
           </a:blip>
           <a:stretch xmlns:a="http://schemas.openxmlformats.org/drawingml/2006/main"/>
@@ -2176,7 +2176,7 @@
           <p:nvPr/>
         </p:nvPicPr>
         <p:blipFill rotWithShape="1">
-          <a:blip xmlns:r="http://schemas.openxmlformats.org/officeDocument/2006/relationships" xmlns:a="http://schemas.openxmlformats.org/drawingml/2006/main" r:embed="R8b170bd059bc4b16">
+          <a:blip xmlns:r="http://schemas.openxmlformats.org/officeDocument/2006/relationships" xmlns:a="http://schemas.openxmlformats.org/drawingml/2006/main" r:embed="R3078c4b1bb6a4e28">
             <a:alphaModFix amt="28000"/>
           </a:blip>
           <a:stretch xmlns:a="http://schemas.openxmlformats.org/drawingml/2006/main"/>
@@ -2451,7 +2451,7 @@
           <p:nvPr/>
         </p:nvPicPr>
         <p:blipFill rotWithShape="1">
-          <a:blip xmlns:r="http://schemas.openxmlformats.org/officeDocument/2006/relationships" xmlns:a="http://schemas.openxmlformats.org/drawingml/2006/main" r:embed="Re67d488b160147a7">
+          <a:blip xmlns:r="http://schemas.openxmlformats.org/officeDocument/2006/relationships" xmlns:a="http://schemas.openxmlformats.org/drawingml/2006/main" r:embed="Rd50c7a83b4344269">
             <a:alphaModFix amt="28000"/>
           </a:blip>
           <a:stretch xmlns:a="http://schemas.openxmlformats.org/drawingml/2006/main"/>
@@ -2875,7 +2875,7 @@
           <p:nvPr/>
         </p:nvPicPr>
         <p:blipFill rotWithShape="1">
-          <a:blip xmlns:r="http://schemas.openxmlformats.org/officeDocument/2006/relationships" xmlns:a="http://schemas.openxmlformats.org/drawingml/2006/main" r:embed="Rf18c91be69d44bfc">
+          <a:blip xmlns:r="http://schemas.openxmlformats.org/officeDocument/2006/relationships" xmlns:a="http://schemas.openxmlformats.org/drawingml/2006/main" r:embed="Rfea3f2bcaecc4dfa">
             <a:alphaModFix amt="28000"/>
           </a:blip>
           <a:stretch xmlns:a="http://schemas.openxmlformats.org/drawingml/2006/main"/>
@@ -3016,7 +3016,7 @@
           <p:nvPr/>
         </p:nvPicPr>
         <p:blipFill rotWithShape="1">
-          <a:blip xmlns:r="http://schemas.openxmlformats.org/officeDocument/2006/relationships" xmlns:a="http://schemas.openxmlformats.org/drawingml/2006/main" r:embed="R38966f56792b4179">
+          <a:blip xmlns:r="http://schemas.openxmlformats.org/officeDocument/2006/relationships" xmlns:a="http://schemas.openxmlformats.org/drawingml/2006/main" r:embed="R89d361283ac1411e">
             <a:alphaModFix amt="28000"/>
           </a:blip>
           <a:stretch xmlns:a="http://schemas.openxmlformats.org/drawingml/2006/main"/>
@@ -3130,7 +3130,7 @@
           <p:nvPr/>
         </p:nvPicPr>
         <p:blipFill rotWithShape="1">
-          <a:blip xmlns:r="http://schemas.openxmlformats.org/officeDocument/2006/relationships" xmlns:a="http://schemas.openxmlformats.org/drawingml/2006/main" r:embed="Rf31cc31ce4464a77">
+          <a:blip xmlns:r="http://schemas.openxmlformats.org/officeDocument/2006/relationships" xmlns:a="http://schemas.openxmlformats.org/drawingml/2006/main" r:embed="R4118622672b14517">
             <a:alphaModFix amt="28000"/>
           </a:blip>
           <a:stretch xmlns:a="http://schemas.openxmlformats.org/drawingml/2006/main"/>
@@ -3457,7 +3457,7 @@
           <p:nvPr/>
         </p:nvPicPr>
         <p:blipFill rotWithShape="1">
-          <a:blip xmlns:r="http://schemas.openxmlformats.org/officeDocument/2006/relationships" xmlns:a="http://schemas.openxmlformats.org/drawingml/2006/main" r:embed="Rd21566c0f7c0482e">
+          <a:blip xmlns:r="http://schemas.openxmlformats.org/officeDocument/2006/relationships" xmlns:a="http://schemas.openxmlformats.org/drawingml/2006/main" r:embed="R073c4332469a430f">
             <a:alphaModFix amt="28000"/>
           </a:blip>
           <a:stretch xmlns:a="http://schemas.openxmlformats.org/drawingml/2006/main"/>
@@ -3745,7 +3745,7 @@
           <p:nvPr/>
         </p:nvPicPr>
         <p:blipFill rotWithShape="1">
-          <a:blip xmlns:r="http://schemas.openxmlformats.org/officeDocument/2006/relationships" xmlns:a="http://schemas.openxmlformats.org/drawingml/2006/main" r:embed="Rf52ee98c4e9f49fe">
+          <a:blip xmlns:r="http://schemas.openxmlformats.org/officeDocument/2006/relationships" xmlns:a="http://schemas.openxmlformats.org/drawingml/2006/main" r:embed="Ra0e77a11650547ac">
             <a:alphaModFix amt="28000"/>
           </a:blip>
           <a:stretch xmlns:a="http://schemas.openxmlformats.org/drawingml/2006/main"/>
@@ -3982,17 +3982,17 @@
   </p:cSld>
   <p:clrMap bg1="lt1" tx1="dk1" bg2="lt2" tx2="dk2" accent1="accent1" accent2="accent2" accent3="accent3" accent4="accent4" accent5="accent5" accent6="accent6" hlink="hlink" folHlink="folHlink"/>
   <p:sldLayoutIdLst>
-    <p:sldLayoutId xmlns:r="http://schemas.openxmlformats.org/officeDocument/2006/relationships" id="2147483649" r:id="Rbaaf0883a5a64a55"/>
-    <p:sldLayoutId xmlns:r="http://schemas.openxmlformats.org/officeDocument/2006/relationships" id="2147483650" r:id="Rfb898003dfe94a05"/>
-    <p:sldLayoutId xmlns:r="http://schemas.openxmlformats.org/officeDocument/2006/relationships" id="2147483651" r:id="R455a4168a23144d1"/>
-    <p:sldLayoutId xmlns:r="http://schemas.openxmlformats.org/officeDocument/2006/relationships" id="2147483652" r:id="Rd5a67b944b2540ef"/>
-    <p:sldLayoutId xmlns:r="http://schemas.openxmlformats.org/officeDocument/2006/relationships" id="2147483653" r:id="Rff67e7e7e107466e"/>
-    <p:sldLayoutId xmlns:r="http://schemas.openxmlformats.org/officeDocument/2006/relationships" id="2147483654" r:id="Reda0daff75aa44f9"/>
-    <p:sldLayoutId xmlns:r="http://schemas.openxmlformats.org/officeDocument/2006/relationships" id="2147483655" r:id="R771341bd63e74204"/>
-    <p:sldLayoutId xmlns:r="http://schemas.openxmlformats.org/officeDocument/2006/relationships" id="2147483656" r:id="Ra7d49ccc9d884198"/>
-    <p:sldLayoutId xmlns:r="http://schemas.openxmlformats.org/officeDocument/2006/relationships" id="2147483657" r:id="Re8ed890686ea454c"/>
-    <p:sldLayoutId xmlns:r="http://schemas.openxmlformats.org/officeDocument/2006/relationships" id="2147483658" r:id="Re37de2a14cd74b35"/>
-    <p:sldLayoutId xmlns:r="http://schemas.openxmlformats.org/officeDocument/2006/relationships" id="2147483659" r:id="R55cd355e74894ffb"/>
+    <p:sldLayoutId xmlns:r="http://schemas.openxmlformats.org/officeDocument/2006/relationships" id="2147483649" r:id="R6b9eeb6af8614382"/>
+    <p:sldLayoutId xmlns:r="http://schemas.openxmlformats.org/officeDocument/2006/relationships" id="2147483650" r:id="Rbe4584c73ceb4892"/>
+    <p:sldLayoutId xmlns:r="http://schemas.openxmlformats.org/officeDocument/2006/relationships" id="2147483651" r:id="R26ecbc1176474fbb"/>
+    <p:sldLayoutId xmlns:r="http://schemas.openxmlformats.org/officeDocument/2006/relationships" id="2147483652" r:id="R3a276c964a6240e3"/>
+    <p:sldLayoutId xmlns:r="http://schemas.openxmlformats.org/officeDocument/2006/relationships" id="2147483653" r:id="Rdba34f1d1d114958"/>
+    <p:sldLayoutId xmlns:r="http://schemas.openxmlformats.org/officeDocument/2006/relationships" id="2147483654" r:id="R61011a41c4a04500"/>
+    <p:sldLayoutId xmlns:r="http://schemas.openxmlformats.org/officeDocument/2006/relationships" id="2147483655" r:id="R3cccac0149ff46a9"/>
+    <p:sldLayoutId xmlns:r="http://schemas.openxmlformats.org/officeDocument/2006/relationships" id="2147483656" r:id="R55e6804f8d1b4cc7"/>
+    <p:sldLayoutId xmlns:r="http://schemas.openxmlformats.org/officeDocument/2006/relationships" id="2147483657" r:id="R9ccb3675e5ee488f"/>
+    <p:sldLayoutId xmlns:r="http://schemas.openxmlformats.org/officeDocument/2006/relationships" id="2147483658" r:id="R5de1fc3fee904a53"/>
+    <p:sldLayoutId xmlns:r="http://schemas.openxmlformats.org/officeDocument/2006/relationships" id="2147483659" r:id="R7a9d226cfbbc4f42"/>
   </p:sldLayoutIdLst>
   <p:hf hdr="0" ftr="0" dt="0"/>
   <p:txStyles>

--- a/Mapped Curriculum Lessons/Grade 7/Lesson 13 - String Positions/String Positions - Slides.pptx
+++ b/Mapped Curriculum Lessons/Grade 7/Lesson 13 - String Positions/String Positions - Slides.pptx
@@ -2,28 +2,28 @@
 <file path=ppt/presentation.xml><?xml version="1.0" encoding="utf-8"?>
 <p:presentation xmlns:p="http://schemas.openxmlformats.org/presentationml/2006/main" embedTrueTypeFonts="1" saveSubsetFonts="0">
   <p:sldMasterIdLst>
-    <p:sldMasterId xmlns:r="http://schemas.openxmlformats.org/officeDocument/2006/relationships" id="2147483648" r:id="R630cf498e0024042"/>
+    <p:sldMasterId xmlns:r="http://schemas.openxmlformats.org/officeDocument/2006/relationships" id="2147483648" r:id="R6ccf9b55552c4347"/>
   </p:sldMasterIdLst>
   <p:notesMasterIdLst>
-    <p:notesMasterId xmlns:r="http://schemas.openxmlformats.org/officeDocument/2006/relationships" r:id="R88a35bef40674d13"/>
+    <p:notesMasterId xmlns:r="http://schemas.openxmlformats.org/officeDocument/2006/relationships" r:id="Rdb7b0d8dab4b40bf"/>
   </p:notesMasterIdLst>
   <p:sldIdLst>
-    <p:sldId xmlns:r="http://schemas.openxmlformats.org/officeDocument/2006/relationships" id="256" r:id="R0bda2d89b2664ad6"/>
-    <p:sldId xmlns:r="http://schemas.openxmlformats.org/officeDocument/2006/relationships" id="257" r:id="Rfa93e7f55e554c61"/>
-    <p:sldId xmlns:r="http://schemas.openxmlformats.org/officeDocument/2006/relationships" id="258" r:id="R958953c134f54ece"/>
-    <p:sldId xmlns:r="http://schemas.openxmlformats.org/officeDocument/2006/relationships" id="259" r:id="R234a8c7588224566"/>
-    <p:sldId xmlns:r="http://schemas.openxmlformats.org/officeDocument/2006/relationships" id="260" r:id="Rc183c7cbd570404e"/>
-    <p:sldId xmlns:r="http://schemas.openxmlformats.org/officeDocument/2006/relationships" id="261" r:id="R8a916504eb0c46a0"/>
-    <p:sldId xmlns:r="http://schemas.openxmlformats.org/officeDocument/2006/relationships" id="262" r:id="R7067c3ed096848ff"/>
-    <p:sldId xmlns:r="http://schemas.openxmlformats.org/officeDocument/2006/relationships" id="263" r:id="R3d52f3b1d1ba45e3"/>
-    <p:sldId xmlns:r="http://schemas.openxmlformats.org/officeDocument/2006/relationships" id="264" r:id="R9ade3c85b35f46b8"/>
+    <p:sldId xmlns:r="http://schemas.openxmlformats.org/officeDocument/2006/relationships" id="256" r:id="R0afaca671ab74630"/>
+    <p:sldId xmlns:r="http://schemas.openxmlformats.org/officeDocument/2006/relationships" id="257" r:id="R7dba5cbf1ec745b8"/>
+    <p:sldId xmlns:r="http://schemas.openxmlformats.org/officeDocument/2006/relationships" id="258" r:id="R81d6cfe97c904bfc"/>
+    <p:sldId xmlns:r="http://schemas.openxmlformats.org/officeDocument/2006/relationships" id="259" r:id="R87339b96fadf45d2"/>
+    <p:sldId xmlns:r="http://schemas.openxmlformats.org/officeDocument/2006/relationships" id="260" r:id="R42d003cc63b64fe0"/>
+    <p:sldId xmlns:r="http://schemas.openxmlformats.org/officeDocument/2006/relationships" id="261" r:id="R67684c2910564f43"/>
+    <p:sldId xmlns:r="http://schemas.openxmlformats.org/officeDocument/2006/relationships" id="262" r:id="R577706229bf74c87"/>
+    <p:sldId xmlns:r="http://schemas.openxmlformats.org/officeDocument/2006/relationships" id="263" r:id="R985f3714c8d74c53"/>
+    <p:sldId xmlns:r="http://schemas.openxmlformats.org/officeDocument/2006/relationships" id="264" r:id="Ref298171428e4bc2"/>
   </p:sldIdLst>
   <p:sldSz cx="12192000" cy="6858000"/>
   <p:notesSz cx="6858000" cy="9144000"/>
   <p:embeddedFontLst>
     <p:embeddedFont>
       <p:font typeface="JetBrains Mono"/>
-      <p:regular xmlns:r="http://schemas.openxmlformats.org/officeDocument/2006/relationships" r:id="R2d1a09d6874540da"/>
+      <p:regular xmlns:r="http://schemas.openxmlformats.org/officeDocument/2006/relationships" r:id="R60b97046313e4af6"/>
     </p:embeddedFont>
   </p:embeddedFontLst>
 </p:presentation>
@@ -1071,7 +1071,7 @@
           <p:nvPr/>
         </p:nvPicPr>
         <p:blipFill rotWithShape="1">
-          <a:blip xmlns:r="http://schemas.openxmlformats.org/officeDocument/2006/relationships" xmlns:a="http://schemas.openxmlformats.org/drawingml/2006/main" r:embed="Rfac01a7902b64bd2"/>
+          <a:blip xmlns:r="http://schemas.openxmlformats.org/officeDocument/2006/relationships" xmlns:a="http://schemas.openxmlformats.org/drawingml/2006/main" r:embed="R7b1491998dd74fca"/>
           <a:stretch xmlns:a="http://schemas.openxmlformats.org/drawingml/2006/main"/>
         </p:blipFill>
         <p:spPr>
@@ -1451,7 +1451,7 @@
           <p:nvPr/>
         </p:nvPicPr>
         <p:blipFill rotWithShape="1">
-          <a:blip xmlns:r="http://schemas.openxmlformats.org/officeDocument/2006/relationships" xmlns:a="http://schemas.openxmlformats.org/drawingml/2006/main" r:embed="R2e916359a31c4b77">
+          <a:blip xmlns:r="http://schemas.openxmlformats.org/officeDocument/2006/relationships" xmlns:a="http://schemas.openxmlformats.org/drawingml/2006/main" r:embed="R0584839a20854da5">
             <a:alphaModFix amt="28000"/>
           </a:blip>
           <a:stretch xmlns:a="http://schemas.openxmlformats.org/drawingml/2006/main"/>
@@ -1664,7 +1664,7 @@
           <p:nvPr/>
         </p:nvPicPr>
         <p:blipFill rotWithShape="1">
-          <a:blip xmlns:r="http://schemas.openxmlformats.org/officeDocument/2006/relationships" xmlns:a="http://schemas.openxmlformats.org/drawingml/2006/main" r:embed="R4d090523299e4bd6">
+          <a:blip xmlns:r="http://schemas.openxmlformats.org/officeDocument/2006/relationships" xmlns:a="http://schemas.openxmlformats.org/drawingml/2006/main" r:embed="R8f22137235394890">
             <a:alphaModFix amt="28000"/>
           </a:blip>
           <a:stretch xmlns:a="http://schemas.openxmlformats.org/drawingml/2006/main"/>
@@ -1899,7 +1899,7 @@
           <p:nvPr/>
         </p:nvPicPr>
         <p:blipFill rotWithShape="1">
-          <a:blip xmlns:r="http://schemas.openxmlformats.org/officeDocument/2006/relationships" xmlns:a="http://schemas.openxmlformats.org/drawingml/2006/main" r:embed="R8e56b84a86844429">
+          <a:blip xmlns:r="http://schemas.openxmlformats.org/officeDocument/2006/relationships" xmlns:a="http://schemas.openxmlformats.org/drawingml/2006/main" r:embed="R8d34d03a60ef4def">
             <a:alphaModFix amt="28000"/>
           </a:blip>
           <a:stretch xmlns:a="http://schemas.openxmlformats.org/drawingml/2006/main"/>
@@ -2176,7 +2176,7 @@
           <p:nvPr/>
         </p:nvPicPr>
         <p:blipFill rotWithShape="1">
-          <a:blip xmlns:r="http://schemas.openxmlformats.org/officeDocument/2006/relationships" xmlns:a="http://schemas.openxmlformats.org/drawingml/2006/main" r:embed="R3078c4b1bb6a4e28">
+          <a:blip xmlns:r="http://schemas.openxmlformats.org/officeDocument/2006/relationships" xmlns:a="http://schemas.openxmlformats.org/drawingml/2006/main" r:embed="Rfe9a3fce3d614a47">
             <a:alphaModFix amt="28000"/>
           </a:blip>
           <a:stretch xmlns:a="http://schemas.openxmlformats.org/drawingml/2006/main"/>
@@ -2451,7 +2451,7 @@
           <p:nvPr/>
         </p:nvPicPr>
         <p:blipFill rotWithShape="1">
-          <a:blip xmlns:r="http://schemas.openxmlformats.org/officeDocument/2006/relationships" xmlns:a="http://schemas.openxmlformats.org/drawingml/2006/main" r:embed="Rd50c7a83b4344269">
+          <a:blip xmlns:r="http://schemas.openxmlformats.org/officeDocument/2006/relationships" xmlns:a="http://schemas.openxmlformats.org/drawingml/2006/main" r:embed="R727bef3d9e784903">
             <a:alphaModFix amt="28000"/>
           </a:blip>
           <a:stretch xmlns:a="http://schemas.openxmlformats.org/drawingml/2006/main"/>
@@ -2875,7 +2875,7 @@
           <p:nvPr/>
         </p:nvPicPr>
         <p:blipFill rotWithShape="1">
-          <a:blip xmlns:r="http://schemas.openxmlformats.org/officeDocument/2006/relationships" xmlns:a="http://schemas.openxmlformats.org/drawingml/2006/main" r:embed="Rfea3f2bcaecc4dfa">
+          <a:blip xmlns:r="http://schemas.openxmlformats.org/officeDocument/2006/relationships" xmlns:a="http://schemas.openxmlformats.org/drawingml/2006/main" r:embed="R45591d9307dc4d52">
             <a:alphaModFix amt="28000"/>
           </a:blip>
           <a:stretch xmlns:a="http://schemas.openxmlformats.org/drawingml/2006/main"/>
@@ -3016,7 +3016,7 @@
           <p:nvPr/>
         </p:nvPicPr>
         <p:blipFill rotWithShape="1">
-          <a:blip xmlns:r="http://schemas.openxmlformats.org/officeDocument/2006/relationships" xmlns:a="http://schemas.openxmlformats.org/drawingml/2006/main" r:embed="R89d361283ac1411e">
+          <a:blip xmlns:r="http://schemas.openxmlformats.org/officeDocument/2006/relationships" xmlns:a="http://schemas.openxmlformats.org/drawingml/2006/main" r:embed="R217c659c5fdf4f8e">
             <a:alphaModFix amt="28000"/>
           </a:blip>
           <a:stretch xmlns:a="http://schemas.openxmlformats.org/drawingml/2006/main"/>
@@ -3130,7 +3130,7 @@
           <p:nvPr/>
         </p:nvPicPr>
         <p:blipFill rotWithShape="1">
-          <a:blip xmlns:r="http://schemas.openxmlformats.org/officeDocument/2006/relationships" xmlns:a="http://schemas.openxmlformats.org/drawingml/2006/main" r:embed="R4118622672b14517">
+          <a:blip xmlns:r="http://schemas.openxmlformats.org/officeDocument/2006/relationships" xmlns:a="http://schemas.openxmlformats.org/drawingml/2006/main" r:embed="Rebb6e8178dfb4a23">
             <a:alphaModFix amt="28000"/>
           </a:blip>
           <a:stretch xmlns:a="http://schemas.openxmlformats.org/drawingml/2006/main"/>
@@ -3457,7 +3457,7 @@
           <p:nvPr/>
         </p:nvPicPr>
         <p:blipFill rotWithShape="1">
-          <a:blip xmlns:r="http://schemas.openxmlformats.org/officeDocument/2006/relationships" xmlns:a="http://schemas.openxmlformats.org/drawingml/2006/main" r:embed="R073c4332469a430f">
+          <a:blip xmlns:r="http://schemas.openxmlformats.org/officeDocument/2006/relationships" xmlns:a="http://schemas.openxmlformats.org/drawingml/2006/main" r:embed="R1263e18039144d36">
             <a:alphaModFix amt="28000"/>
           </a:blip>
           <a:stretch xmlns:a="http://schemas.openxmlformats.org/drawingml/2006/main"/>
@@ -3745,7 +3745,7 @@
           <p:nvPr/>
         </p:nvPicPr>
         <p:blipFill rotWithShape="1">
-          <a:blip xmlns:r="http://schemas.openxmlformats.org/officeDocument/2006/relationships" xmlns:a="http://schemas.openxmlformats.org/drawingml/2006/main" r:embed="Ra0e77a11650547ac">
+          <a:blip xmlns:r="http://schemas.openxmlformats.org/officeDocument/2006/relationships" xmlns:a="http://schemas.openxmlformats.org/drawingml/2006/main" r:embed="Ra058d4de9d2a48d0">
             <a:alphaModFix amt="28000"/>
           </a:blip>
           <a:stretch xmlns:a="http://schemas.openxmlformats.org/drawingml/2006/main"/>
@@ -3982,17 +3982,17 @@
   </p:cSld>
   <p:clrMap bg1="lt1" tx1="dk1" bg2="lt2" tx2="dk2" accent1="accent1" accent2="accent2" accent3="accent3" accent4="accent4" accent5="accent5" accent6="accent6" hlink="hlink" folHlink="folHlink"/>
   <p:sldLayoutIdLst>
-    <p:sldLayoutId xmlns:r="http://schemas.openxmlformats.org/officeDocument/2006/relationships" id="2147483649" r:id="R6b9eeb6af8614382"/>
-    <p:sldLayoutId xmlns:r="http://schemas.openxmlformats.org/officeDocument/2006/relationships" id="2147483650" r:id="Rbe4584c73ceb4892"/>
-    <p:sldLayoutId xmlns:r="http://schemas.openxmlformats.org/officeDocument/2006/relationships" id="2147483651" r:id="R26ecbc1176474fbb"/>
-    <p:sldLayoutId xmlns:r="http://schemas.openxmlformats.org/officeDocument/2006/relationships" id="2147483652" r:id="R3a276c964a6240e3"/>
-    <p:sldLayoutId xmlns:r="http://schemas.openxmlformats.org/officeDocument/2006/relationships" id="2147483653" r:id="Rdba34f1d1d114958"/>
-    <p:sldLayoutId xmlns:r="http://schemas.openxmlformats.org/officeDocument/2006/relationships" id="2147483654" r:id="R61011a41c4a04500"/>
-    <p:sldLayoutId xmlns:r="http://schemas.openxmlformats.org/officeDocument/2006/relationships" id="2147483655" r:id="R3cccac0149ff46a9"/>
-    <p:sldLayoutId xmlns:r="http://schemas.openxmlformats.org/officeDocument/2006/relationships" id="2147483656" r:id="R55e6804f8d1b4cc7"/>
-    <p:sldLayoutId xmlns:r="http://schemas.openxmlformats.org/officeDocument/2006/relationships" id="2147483657" r:id="R9ccb3675e5ee488f"/>
-    <p:sldLayoutId xmlns:r="http://schemas.openxmlformats.org/officeDocument/2006/relationships" id="2147483658" r:id="R5de1fc3fee904a53"/>
-    <p:sldLayoutId xmlns:r="http://schemas.openxmlformats.org/officeDocument/2006/relationships" id="2147483659" r:id="R7a9d226cfbbc4f42"/>
+    <p:sldLayoutId xmlns:r="http://schemas.openxmlformats.org/officeDocument/2006/relationships" id="2147483649" r:id="Rb55ab5e7c11246cc"/>
+    <p:sldLayoutId xmlns:r="http://schemas.openxmlformats.org/officeDocument/2006/relationships" id="2147483650" r:id="R72fcc99e558c4b3e"/>
+    <p:sldLayoutId xmlns:r="http://schemas.openxmlformats.org/officeDocument/2006/relationships" id="2147483651" r:id="Refcfcbd6c90845e0"/>
+    <p:sldLayoutId xmlns:r="http://schemas.openxmlformats.org/officeDocument/2006/relationships" id="2147483652" r:id="R6cfb81d427af430e"/>
+    <p:sldLayoutId xmlns:r="http://schemas.openxmlformats.org/officeDocument/2006/relationships" id="2147483653" r:id="Rb4261d71ca5a4a0c"/>
+    <p:sldLayoutId xmlns:r="http://schemas.openxmlformats.org/officeDocument/2006/relationships" id="2147483654" r:id="Rc69e4d3de752422e"/>
+    <p:sldLayoutId xmlns:r="http://schemas.openxmlformats.org/officeDocument/2006/relationships" id="2147483655" r:id="R8a060a8b23594597"/>
+    <p:sldLayoutId xmlns:r="http://schemas.openxmlformats.org/officeDocument/2006/relationships" id="2147483656" r:id="R5f4618ffffcc41f8"/>
+    <p:sldLayoutId xmlns:r="http://schemas.openxmlformats.org/officeDocument/2006/relationships" id="2147483657" r:id="R7a66a412c14f4101"/>
+    <p:sldLayoutId xmlns:r="http://schemas.openxmlformats.org/officeDocument/2006/relationships" id="2147483658" r:id="R04632ace8c164117"/>
+    <p:sldLayoutId xmlns:r="http://schemas.openxmlformats.org/officeDocument/2006/relationships" id="2147483659" r:id="R47cecd6c9bfc4344"/>
   </p:sldLayoutIdLst>
   <p:hf hdr="0" ftr="0" dt="0"/>
   <p:txStyles>
@@ -7369,7 +7369,73 @@
                 <a:ea typeface="Calibri"/>
                 <a:cs typeface="Calibri"/>
               </a:rPr>
-              <a:t>Create a two-letter badge from two words. Use indexing to display the first character of each; use inputs with different capitalisation to inspect the result.</a:t>
+              <a:t>Ask for two words and store them in [first_word] and [second_word]. Use position 0 to display the first character of each word. Test </a:t>
+            </a:r>
+            <a:r>
+              <a:rPr sz="2400" b="0">
+                <a:solidFill>
+                  <a:srgbClr val="067D17"/>
+                </a:solidFill>
+                <a:latin typeface="JetBrains Mono"/>
+                <a:ea typeface="JetBrains Mono"/>
+                <a:cs typeface="JetBrains Mono"/>
+              </a:rPr>
+              <a:t>"Code"</a:t>
+            </a:r>
+            <a:r>
+              <a:rPr sz="2400" b="0">
+                <a:solidFill>
+                  <a:srgbClr val="080808"/>
+                </a:solidFill>
+                <a:latin typeface="Calibri"/>
+                <a:ea typeface="Calibri"/>
+                <a:cs typeface="Calibri"/>
+              </a:rPr>
+              <a:t> and </a:t>
+            </a:r>
+            <a:r>
+              <a:rPr sz="2400" b="0">
+                <a:solidFill>
+                  <a:srgbClr val="067D17"/>
+                </a:solidFill>
+                <a:latin typeface="JetBrains Mono"/>
+                <a:ea typeface="JetBrains Mono"/>
+                <a:cs typeface="JetBrains Mono"/>
+              </a:rPr>
+              <a:t>"python"</a:t>
+            </a:r>
+            <a:r>
+              <a:rPr sz="2400" b="0">
+                <a:solidFill>
+                  <a:srgbClr val="080808"/>
+                </a:solidFill>
+                <a:latin typeface="Calibri"/>
+                <a:ea typeface="Calibri"/>
+                <a:cs typeface="Calibri"/>
+              </a:rPr>
+              <a:t>; display </a:t>
+            </a:r>
+            <a:r>
+              <a:rPr sz="2400" b="0">
+                <a:solidFill>
+                  <a:srgbClr val="067D17"/>
+                </a:solidFill>
+                <a:latin typeface="JetBrains Mono"/>
+                <a:ea typeface="JetBrains Mono"/>
+                <a:cs typeface="JetBrains Mono"/>
+              </a:rPr>
+              <a:t>"Initials: C p"</a:t>
+            </a:r>
+            <a:r>
+              <a:rPr sz="2400" b="0">
+                <a:solidFill>
+                  <a:srgbClr val="080808"/>
+                </a:solidFill>
+                <a:latin typeface="Calibri"/>
+                <a:ea typeface="Calibri"/>
+                <a:cs typeface="Calibri"/>
+              </a:rPr>
+              <a:t>.</a:t>
             </a:r>
           </a:p>
         </p:txBody>
@@ -7917,7 +7983,7 @@
                 <a:ea typeface="Calibri"/>
                 <a:cs typeface="Calibri"/>
               </a:rPr>
-              <a:t>Build a reference code for a six-letter word. Use two slices to display its first two characters, then characters five and six. Try </a:t>
+              <a:t>Ask for a six-letter word and store it in [word]. Store the slice from positions 0 to 2 in [first_part] and the slice from positions 4 to 6 in [last_part]. Display </a:t>
             </a:r>
             <a:r>
               <a:rPr sz="2400" b="0">
@@ -7928,7 +7994,7 @@
                 <a:ea typeface="JetBrains Mono"/>
                 <a:cs typeface="JetBrains Mono"/>
               </a:rPr>
-              <a:t>"python"</a:t>
+              <a:t>"Reference:"</a:t>
             </a:r>
             <a:r>
               <a:rPr sz="2400" b="0">
@@ -7939,7 +8005,7 @@
                 <a:ea typeface="Calibri"/>
                 <a:cs typeface="Calibri"/>
               </a:rPr>
-              <a:t>: the two parts should be </a:t>
+              <a:t> followed by both parts. Test </a:t>
             </a:r>
             <a:r>
               <a:rPr sz="2400" b="0">
@@ -7950,7 +8016,7 @@
                 <a:ea typeface="JetBrains Mono"/>
                 <a:cs typeface="JetBrains Mono"/>
               </a:rPr>
-              <a:t>"py"</a:t>
+              <a:t>"python"</a:t>
             </a:r>
             <a:r>
               <a:rPr sz="2400" b="0">
@@ -7961,7 +8027,7 @@
                 <a:ea typeface="Calibri"/>
                 <a:cs typeface="Calibri"/>
               </a:rPr>
-              <a:t> and </a:t>
+              <a:t>; display </a:t>
             </a:r>
             <a:r>
               <a:rPr sz="2400" b="0">
@@ -7972,7 +8038,7 @@
                 <a:ea typeface="JetBrains Mono"/>
                 <a:cs typeface="JetBrains Mono"/>
               </a:rPr>
-              <a:t>"on"</a:t>
+              <a:t>"Reference: py on"</a:t>
             </a:r>
             <a:r>
               <a:rPr sz="2400" b="0">

--- a/Mapped Curriculum Lessons/Grade 7/Lesson 13 - String Positions/String Positions - Slides.pptx
+++ b/Mapped Curriculum Lessons/Grade 7/Lesson 13 - String Positions/String Positions - Slides.pptx
@@ -2,28 +2,28 @@
 <file path=ppt/presentation.xml><?xml version="1.0" encoding="utf-8"?>
 <p:presentation xmlns:p="http://schemas.openxmlformats.org/presentationml/2006/main" embedTrueTypeFonts="1" saveSubsetFonts="0">
   <p:sldMasterIdLst>
-    <p:sldMasterId xmlns:r="http://schemas.openxmlformats.org/officeDocument/2006/relationships" id="2147483648" r:id="R6ccf9b55552c4347"/>
+    <p:sldMasterId xmlns:r="http://schemas.openxmlformats.org/officeDocument/2006/relationships" id="2147483648" r:id="R9fcd10d632bf4ca9"/>
   </p:sldMasterIdLst>
   <p:notesMasterIdLst>
-    <p:notesMasterId xmlns:r="http://schemas.openxmlformats.org/officeDocument/2006/relationships" r:id="Rdb7b0d8dab4b40bf"/>
+    <p:notesMasterId xmlns:r="http://schemas.openxmlformats.org/officeDocument/2006/relationships" r:id="Rd26e91d133b44066"/>
   </p:notesMasterIdLst>
   <p:sldIdLst>
-    <p:sldId xmlns:r="http://schemas.openxmlformats.org/officeDocument/2006/relationships" id="256" r:id="R0afaca671ab74630"/>
-    <p:sldId xmlns:r="http://schemas.openxmlformats.org/officeDocument/2006/relationships" id="257" r:id="R7dba5cbf1ec745b8"/>
-    <p:sldId xmlns:r="http://schemas.openxmlformats.org/officeDocument/2006/relationships" id="258" r:id="R81d6cfe97c904bfc"/>
-    <p:sldId xmlns:r="http://schemas.openxmlformats.org/officeDocument/2006/relationships" id="259" r:id="R87339b96fadf45d2"/>
-    <p:sldId xmlns:r="http://schemas.openxmlformats.org/officeDocument/2006/relationships" id="260" r:id="R42d003cc63b64fe0"/>
-    <p:sldId xmlns:r="http://schemas.openxmlformats.org/officeDocument/2006/relationships" id="261" r:id="R67684c2910564f43"/>
-    <p:sldId xmlns:r="http://schemas.openxmlformats.org/officeDocument/2006/relationships" id="262" r:id="R577706229bf74c87"/>
-    <p:sldId xmlns:r="http://schemas.openxmlformats.org/officeDocument/2006/relationships" id="263" r:id="R985f3714c8d74c53"/>
-    <p:sldId xmlns:r="http://schemas.openxmlformats.org/officeDocument/2006/relationships" id="264" r:id="Ref298171428e4bc2"/>
+    <p:sldId xmlns:r="http://schemas.openxmlformats.org/officeDocument/2006/relationships" id="256" r:id="R3424e64927464d12"/>
+    <p:sldId xmlns:r="http://schemas.openxmlformats.org/officeDocument/2006/relationships" id="257" r:id="R3d0ceb49de8c404d"/>
+    <p:sldId xmlns:r="http://schemas.openxmlformats.org/officeDocument/2006/relationships" id="258" r:id="R3668421a5a124759"/>
+    <p:sldId xmlns:r="http://schemas.openxmlformats.org/officeDocument/2006/relationships" id="259" r:id="R5d05ce2495b44c31"/>
+    <p:sldId xmlns:r="http://schemas.openxmlformats.org/officeDocument/2006/relationships" id="260" r:id="Raee880242d034754"/>
+    <p:sldId xmlns:r="http://schemas.openxmlformats.org/officeDocument/2006/relationships" id="261" r:id="R22100d0941fa4785"/>
+    <p:sldId xmlns:r="http://schemas.openxmlformats.org/officeDocument/2006/relationships" id="262" r:id="R0d6cf9838adc4dc8"/>
+    <p:sldId xmlns:r="http://schemas.openxmlformats.org/officeDocument/2006/relationships" id="263" r:id="R8a809d6386fb4d19"/>
+    <p:sldId xmlns:r="http://schemas.openxmlformats.org/officeDocument/2006/relationships" id="264" r:id="R931a5bc4b9694088"/>
   </p:sldIdLst>
   <p:sldSz cx="12192000" cy="6858000"/>
   <p:notesSz cx="6858000" cy="9144000"/>
   <p:embeddedFontLst>
     <p:embeddedFont>
       <p:font typeface="JetBrains Mono"/>
-      <p:regular xmlns:r="http://schemas.openxmlformats.org/officeDocument/2006/relationships" r:id="R60b97046313e4af6"/>
+      <p:regular xmlns:r="http://schemas.openxmlformats.org/officeDocument/2006/relationships" r:id="R4713141cab4a4775"/>
     </p:embeddedFont>
   </p:embeddedFontLst>
 </p:presentation>
@@ -1071,7 +1071,7 @@
           <p:nvPr/>
         </p:nvPicPr>
         <p:blipFill rotWithShape="1">
-          <a:blip xmlns:r="http://schemas.openxmlformats.org/officeDocument/2006/relationships" xmlns:a="http://schemas.openxmlformats.org/drawingml/2006/main" r:embed="R7b1491998dd74fca"/>
+          <a:blip xmlns:r="http://schemas.openxmlformats.org/officeDocument/2006/relationships" xmlns:a="http://schemas.openxmlformats.org/drawingml/2006/main" r:embed="Rf7ad3a2cd07e430d"/>
           <a:stretch xmlns:a="http://schemas.openxmlformats.org/drawingml/2006/main"/>
         </p:blipFill>
         <p:spPr>
@@ -1451,7 +1451,7 @@
           <p:nvPr/>
         </p:nvPicPr>
         <p:blipFill rotWithShape="1">
-          <a:blip xmlns:r="http://schemas.openxmlformats.org/officeDocument/2006/relationships" xmlns:a="http://schemas.openxmlformats.org/drawingml/2006/main" r:embed="R0584839a20854da5">
+          <a:blip xmlns:r="http://schemas.openxmlformats.org/officeDocument/2006/relationships" xmlns:a="http://schemas.openxmlformats.org/drawingml/2006/main" r:embed="R9d6bfbfc83094e07">
             <a:alphaModFix amt="28000"/>
           </a:blip>
           <a:stretch xmlns:a="http://schemas.openxmlformats.org/drawingml/2006/main"/>
@@ -1664,7 +1664,7 @@
           <p:nvPr/>
         </p:nvPicPr>
         <p:blipFill rotWithShape="1">
-          <a:blip xmlns:r="http://schemas.openxmlformats.org/officeDocument/2006/relationships" xmlns:a="http://schemas.openxmlformats.org/drawingml/2006/main" r:embed="R8f22137235394890">
+          <a:blip xmlns:r="http://schemas.openxmlformats.org/officeDocument/2006/relationships" xmlns:a="http://schemas.openxmlformats.org/drawingml/2006/main" r:embed="R667ec418d58d46a0">
             <a:alphaModFix amt="28000"/>
           </a:blip>
           <a:stretch xmlns:a="http://schemas.openxmlformats.org/drawingml/2006/main"/>
@@ -1899,7 +1899,7 @@
           <p:nvPr/>
         </p:nvPicPr>
         <p:blipFill rotWithShape="1">
-          <a:blip xmlns:r="http://schemas.openxmlformats.org/officeDocument/2006/relationships" xmlns:a="http://schemas.openxmlformats.org/drawingml/2006/main" r:embed="R8d34d03a60ef4def">
+          <a:blip xmlns:r="http://schemas.openxmlformats.org/officeDocument/2006/relationships" xmlns:a="http://schemas.openxmlformats.org/drawingml/2006/main" r:embed="Rb5300cfc0e3c471a">
             <a:alphaModFix amt="28000"/>
           </a:blip>
           <a:stretch xmlns:a="http://schemas.openxmlformats.org/drawingml/2006/main"/>
@@ -2176,7 +2176,7 @@
           <p:nvPr/>
         </p:nvPicPr>
         <p:blipFill rotWithShape="1">
-          <a:blip xmlns:r="http://schemas.openxmlformats.org/officeDocument/2006/relationships" xmlns:a="http://schemas.openxmlformats.org/drawingml/2006/main" r:embed="Rfe9a3fce3d614a47">
+          <a:blip xmlns:r="http://schemas.openxmlformats.org/officeDocument/2006/relationships" xmlns:a="http://schemas.openxmlformats.org/drawingml/2006/main" r:embed="Re8d948e6a1a945a3">
             <a:alphaModFix amt="28000"/>
           </a:blip>
           <a:stretch xmlns:a="http://schemas.openxmlformats.org/drawingml/2006/main"/>
@@ -2451,7 +2451,7 @@
           <p:nvPr/>
         </p:nvPicPr>
         <p:blipFill rotWithShape="1">
-          <a:blip xmlns:r="http://schemas.openxmlformats.org/officeDocument/2006/relationships" xmlns:a="http://schemas.openxmlformats.org/drawingml/2006/main" r:embed="R727bef3d9e784903">
+          <a:blip xmlns:r="http://schemas.openxmlformats.org/officeDocument/2006/relationships" xmlns:a="http://schemas.openxmlformats.org/drawingml/2006/main" r:embed="R25d35cbad7fb4e43">
             <a:alphaModFix amt="28000"/>
           </a:blip>
           <a:stretch xmlns:a="http://schemas.openxmlformats.org/drawingml/2006/main"/>
@@ -2875,7 +2875,7 @@
           <p:nvPr/>
         </p:nvPicPr>
         <p:blipFill rotWithShape="1">
-          <a:blip xmlns:r="http://schemas.openxmlformats.org/officeDocument/2006/relationships" xmlns:a="http://schemas.openxmlformats.org/drawingml/2006/main" r:embed="R45591d9307dc4d52">
+          <a:blip xmlns:r="http://schemas.openxmlformats.org/officeDocument/2006/relationships" xmlns:a="http://schemas.openxmlformats.org/drawingml/2006/main" r:embed="Racd7f14b1f5f423f">
             <a:alphaModFix amt="28000"/>
           </a:blip>
           <a:stretch xmlns:a="http://schemas.openxmlformats.org/drawingml/2006/main"/>
@@ -3016,7 +3016,7 @@
           <p:nvPr/>
         </p:nvPicPr>
         <p:blipFill rotWithShape="1">
-          <a:blip xmlns:r="http://schemas.openxmlformats.org/officeDocument/2006/relationships" xmlns:a="http://schemas.openxmlformats.org/drawingml/2006/main" r:embed="R217c659c5fdf4f8e">
+          <a:blip xmlns:r="http://schemas.openxmlformats.org/officeDocument/2006/relationships" xmlns:a="http://schemas.openxmlformats.org/drawingml/2006/main" r:embed="R016f943a8c3a44b0">
             <a:alphaModFix amt="28000"/>
           </a:blip>
           <a:stretch xmlns:a="http://schemas.openxmlformats.org/drawingml/2006/main"/>
@@ -3130,7 +3130,7 @@
           <p:nvPr/>
         </p:nvPicPr>
         <p:blipFill rotWithShape="1">
-          <a:blip xmlns:r="http://schemas.openxmlformats.org/officeDocument/2006/relationships" xmlns:a="http://schemas.openxmlformats.org/drawingml/2006/main" r:embed="Rebb6e8178dfb4a23">
+          <a:blip xmlns:r="http://schemas.openxmlformats.org/officeDocument/2006/relationships" xmlns:a="http://schemas.openxmlformats.org/drawingml/2006/main" r:embed="R1e05c1d60cb94741">
             <a:alphaModFix amt="28000"/>
           </a:blip>
           <a:stretch xmlns:a="http://schemas.openxmlformats.org/drawingml/2006/main"/>
@@ -3457,7 +3457,7 @@
           <p:nvPr/>
         </p:nvPicPr>
         <p:blipFill rotWithShape="1">
-          <a:blip xmlns:r="http://schemas.openxmlformats.org/officeDocument/2006/relationships" xmlns:a="http://schemas.openxmlformats.org/drawingml/2006/main" r:embed="R1263e18039144d36">
+          <a:blip xmlns:r="http://schemas.openxmlformats.org/officeDocument/2006/relationships" xmlns:a="http://schemas.openxmlformats.org/drawingml/2006/main" r:embed="Rb5b96bf696a940bb">
             <a:alphaModFix amt="28000"/>
           </a:blip>
           <a:stretch xmlns:a="http://schemas.openxmlformats.org/drawingml/2006/main"/>
@@ -3745,7 +3745,7 @@
           <p:nvPr/>
         </p:nvPicPr>
         <p:blipFill rotWithShape="1">
-          <a:blip xmlns:r="http://schemas.openxmlformats.org/officeDocument/2006/relationships" xmlns:a="http://schemas.openxmlformats.org/drawingml/2006/main" r:embed="Ra058d4de9d2a48d0">
+          <a:blip xmlns:r="http://schemas.openxmlformats.org/officeDocument/2006/relationships" xmlns:a="http://schemas.openxmlformats.org/drawingml/2006/main" r:embed="R62fa1e2ea14a4b4d">
             <a:alphaModFix amt="28000"/>
           </a:blip>
           <a:stretch xmlns:a="http://schemas.openxmlformats.org/drawingml/2006/main"/>
@@ -3982,17 +3982,17 @@
   </p:cSld>
   <p:clrMap bg1="lt1" tx1="dk1" bg2="lt2" tx2="dk2" accent1="accent1" accent2="accent2" accent3="accent3" accent4="accent4" accent5="accent5" accent6="accent6" hlink="hlink" folHlink="folHlink"/>
   <p:sldLayoutIdLst>
-    <p:sldLayoutId xmlns:r="http://schemas.openxmlformats.org/officeDocument/2006/relationships" id="2147483649" r:id="Rb55ab5e7c11246cc"/>
-    <p:sldLayoutId xmlns:r="http://schemas.openxmlformats.org/officeDocument/2006/relationships" id="2147483650" r:id="R72fcc99e558c4b3e"/>
-    <p:sldLayoutId xmlns:r="http://schemas.openxmlformats.org/officeDocument/2006/relationships" id="2147483651" r:id="Refcfcbd6c90845e0"/>
-    <p:sldLayoutId xmlns:r="http://schemas.openxmlformats.org/officeDocument/2006/relationships" id="2147483652" r:id="R6cfb81d427af430e"/>
-    <p:sldLayoutId xmlns:r="http://schemas.openxmlformats.org/officeDocument/2006/relationships" id="2147483653" r:id="Rb4261d71ca5a4a0c"/>
-    <p:sldLayoutId xmlns:r="http://schemas.openxmlformats.org/officeDocument/2006/relationships" id="2147483654" r:id="Rc69e4d3de752422e"/>
-    <p:sldLayoutId xmlns:r="http://schemas.openxmlformats.org/officeDocument/2006/relationships" id="2147483655" r:id="R8a060a8b23594597"/>
-    <p:sldLayoutId xmlns:r="http://schemas.openxmlformats.org/officeDocument/2006/relationships" id="2147483656" r:id="R5f4618ffffcc41f8"/>
-    <p:sldLayoutId xmlns:r="http://schemas.openxmlformats.org/officeDocument/2006/relationships" id="2147483657" r:id="R7a66a412c14f4101"/>
-    <p:sldLayoutId xmlns:r="http://schemas.openxmlformats.org/officeDocument/2006/relationships" id="2147483658" r:id="R04632ace8c164117"/>
-    <p:sldLayoutId xmlns:r="http://schemas.openxmlformats.org/officeDocument/2006/relationships" id="2147483659" r:id="R47cecd6c9bfc4344"/>
+    <p:sldLayoutId xmlns:r="http://schemas.openxmlformats.org/officeDocument/2006/relationships" id="2147483649" r:id="R1d8aad6f27a64118"/>
+    <p:sldLayoutId xmlns:r="http://schemas.openxmlformats.org/officeDocument/2006/relationships" id="2147483650" r:id="Re6afd97150904991"/>
+    <p:sldLayoutId xmlns:r="http://schemas.openxmlformats.org/officeDocument/2006/relationships" id="2147483651" r:id="Rc150e1cdac744b89"/>
+    <p:sldLayoutId xmlns:r="http://schemas.openxmlformats.org/officeDocument/2006/relationships" id="2147483652" r:id="R8fac4a03d5d14b5f"/>
+    <p:sldLayoutId xmlns:r="http://schemas.openxmlformats.org/officeDocument/2006/relationships" id="2147483653" r:id="R3c3fb805611245f1"/>
+    <p:sldLayoutId xmlns:r="http://schemas.openxmlformats.org/officeDocument/2006/relationships" id="2147483654" r:id="R1b17ba1dc4e04ebe"/>
+    <p:sldLayoutId xmlns:r="http://schemas.openxmlformats.org/officeDocument/2006/relationships" id="2147483655" r:id="Rb5e8d713bac044b5"/>
+    <p:sldLayoutId xmlns:r="http://schemas.openxmlformats.org/officeDocument/2006/relationships" id="2147483656" r:id="R01254f457aec40d2"/>
+    <p:sldLayoutId xmlns:r="http://schemas.openxmlformats.org/officeDocument/2006/relationships" id="2147483657" r:id="R054fc79feaa24f0c"/>
+    <p:sldLayoutId xmlns:r="http://schemas.openxmlformats.org/officeDocument/2006/relationships" id="2147483658" r:id="Raa67a8df59824fff"/>
+    <p:sldLayoutId xmlns:r="http://schemas.openxmlformats.org/officeDocument/2006/relationships" id="2147483659" r:id="R67a2b793053344b4"/>
   </p:sldLayoutIdLst>
   <p:hf hdr="0" ftr="0" dt="0"/>
   <p:txStyles>
@@ -6777,18 +6777,21 @@
                 <a:ea typeface="Calibri"/>
                 <a:cs typeface="Calibri"/>
               </a:rPr>
-              <a:t>Change the slice’s stop position so the preview contains four characters instead of three. Try </a:t>
-            </a:r>
-            <a:r>
-              <a:rPr sz="2400" b="0">
-                <a:solidFill>
-                  <a:srgbClr val="067D17"/>
-                </a:solidFill>
-                <a:latin typeface="JetBrains Mono"/>
-                <a:ea typeface="JetBrains Mono"/>
-                <a:cs typeface="JetBrains Mono"/>
-              </a:rPr>
-              <a:t>"code"</a:t>
+              <a:t>Change the example so it also slices the characters at positions 2 and 3 into </a:t>
+            </a:r>
+            <a:r>
+              <a:rPr sz="2050" b="0">
+                <a:solidFill>
+                  <a:srgbClr val="6A1B9A"/>
+                </a:solidFill>
+                <a:highlight>
+                  <a:srgbClr val="ECEAF4"/>
+                </a:highlight>
+                <a:latin typeface="JetBrains Mono"/>
+                <a:ea typeface="JetBrains Mono"/>
+                <a:cs typeface="JetBrains Mono"/>
+              </a:rPr>
+              <a:t> middle </a:t>
             </a:r>
             <a:r>
               <a:rPr sz="2400" b="0">
@@ -6799,10 +6802,10 @@
                 <a:ea typeface="Calibri"/>
                 <a:cs typeface="Calibri"/>
               </a:rPr>
-              <a:t> and </a:t>
-            </a:r>
-            <a:r>
-              <a:rPr sz="2400" b="0">
+              <a:t>. Display </a:t>
+            </a:r>
+            <a:r>
+              <a:rPr sz="2050" b="0">
                 <a:solidFill>
                   <a:srgbClr val="067D17"/>
                 </a:solidFill>
@@ -6810,7 +6813,7 @@
                 <a:ea typeface="JetBrains Mono"/>
                 <a:cs typeface="JetBrains Mono"/>
               </a:rPr>
-              <a:t>"python"</a:t>
+              <a:t>"Middle:"</a:t>
             </a:r>
             <a:r>
               <a:rPr sz="2400" b="0">
@@ -6821,7 +6824,76 @@
                 <a:ea typeface="Calibri"/>
                 <a:cs typeface="Calibri"/>
               </a:rPr>
-              <a:t>; both previews should contain four characters.</a:t>
+              <a:t> followed by </a:t>
+            </a:r>
+            <a:r>
+              <a:rPr sz="2050" b="0">
+                <a:solidFill>
+                  <a:srgbClr val="6A1B9A"/>
+                </a:solidFill>
+                <a:highlight>
+                  <a:srgbClr val="ECEAF4"/>
+                </a:highlight>
+                <a:latin typeface="JetBrains Mono"/>
+                <a:ea typeface="JetBrains Mono"/>
+                <a:cs typeface="JetBrains Mono"/>
+              </a:rPr>
+              <a:t> middle </a:t>
+            </a:r>
+            <a:r>
+              <a:rPr sz="2400" b="0">
+                <a:solidFill>
+                  <a:srgbClr val="080808"/>
+                </a:solidFill>
+                <a:latin typeface="Calibri"/>
+                <a:ea typeface="Calibri"/>
+                <a:cs typeface="Calibri"/>
+              </a:rPr>
+              <a:t>. For example, </a:t>
+            </a:r>
+            <a:r>
+              <a:rPr sz="2050" b="0">
+                <a:solidFill>
+                  <a:srgbClr val="067D17"/>
+                </a:solidFill>
+                <a:latin typeface="JetBrains Mono"/>
+                <a:ea typeface="JetBrains Mono"/>
+                <a:cs typeface="JetBrains Mono"/>
+              </a:rPr>
+              <a:t>"python"</a:t>
+            </a:r>
+            <a:r>
+              <a:rPr sz="2400" b="0">
+                <a:solidFill>
+                  <a:srgbClr val="080808"/>
+                </a:solidFill>
+                <a:latin typeface="Calibri"/>
+                <a:ea typeface="Calibri"/>
+                <a:cs typeface="Calibri"/>
+              </a:rPr>
+              <a:t> displays </a:t>
+            </a:r>
+            <a:r>
+              <a:rPr sz="2050" b="0">
+                <a:solidFill>
+                  <a:srgbClr val="067D17"/>
+                </a:solidFill>
+                <a:latin typeface="JetBrains Mono"/>
+                <a:ea typeface="JetBrains Mono"/>
+                <a:cs typeface="JetBrains Mono"/>
+              </a:rPr>
+              <a:t>"Middle: th"</a:t>
+            </a:r>
+            <a:r>
+              <a:rPr sz="2400" b="0">
+                <a:solidFill>
+                  <a:srgbClr val="080808"/>
+                </a:solidFill>
+                <a:latin typeface="Calibri"/>
+                <a:ea typeface="Calibri"/>
+                <a:cs typeface="Calibri"/>
+              </a:rPr>
+              <a:t>.</a:t>
             </a:r>
           </a:p>
         </p:txBody>
@@ -7369,18 +7441,21 @@
                 <a:ea typeface="Calibri"/>
                 <a:cs typeface="Calibri"/>
               </a:rPr>
-              <a:t>Ask for two words and store them in [first_word] and [second_word]. Use position 0 to display the first character of each word. Test </a:t>
-            </a:r>
-            <a:r>
-              <a:rPr sz="2400" b="0">
-                <a:solidFill>
-                  <a:srgbClr val="067D17"/>
-                </a:solidFill>
-                <a:latin typeface="JetBrains Mono"/>
-                <a:ea typeface="JetBrains Mono"/>
-                <a:cs typeface="JetBrains Mono"/>
-              </a:rPr>
-              <a:t>"Code"</a:t>
+              <a:t>Change the example so it asks for two words in </a:t>
+            </a:r>
+            <a:r>
+              <a:rPr sz="2050" b="0">
+                <a:solidFill>
+                  <a:srgbClr val="6A1B9A"/>
+                </a:solidFill>
+                <a:highlight>
+                  <a:srgbClr val="ECEAF4"/>
+                </a:highlight>
+                <a:latin typeface="JetBrains Mono"/>
+                <a:ea typeface="JetBrains Mono"/>
+                <a:cs typeface="JetBrains Mono"/>
+              </a:rPr>
+              <a:t> first_word </a:t>
             </a:r>
             <a:r>
               <a:rPr sz="2400" b="0">
@@ -7394,15 +7469,18 @@
               <a:t> and </a:t>
             </a:r>
             <a:r>
-              <a:rPr sz="2400" b="0">
-                <a:solidFill>
-                  <a:srgbClr val="067D17"/>
-                </a:solidFill>
-                <a:latin typeface="JetBrains Mono"/>
-                <a:ea typeface="JetBrains Mono"/>
-                <a:cs typeface="JetBrains Mono"/>
-              </a:rPr>
-              <a:t>"python"</a:t>
+              <a:rPr sz="2050" b="0">
+                <a:solidFill>
+                  <a:srgbClr val="6A1B9A"/>
+                </a:solidFill>
+                <a:highlight>
+                  <a:srgbClr val="ECEAF4"/>
+                </a:highlight>
+                <a:latin typeface="JetBrains Mono"/>
+                <a:ea typeface="JetBrains Mono"/>
+                <a:cs typeface="JetBrains Mono"/>
+              </a:rPr>
+              <a:t> second_word </a:t>
             </a:r>
             <a:r>
               <a:rPr sz="2400" b="0">
@@ -7413,10 +7491,76 @@
                 <a:ea typeface="Calibri"/>
                 <a:cs typeface="Calibri"/>
               </a:rPr>
-              <a:t>; display </a:t>
+              <a:t>. Use position 0 to display the first character of each word after </a:t>
+            </a:r>
+            <a:r>
+              <a:rPr sz="2050" b="0">
+                <a:solidFill>
+                  <a:srgbClr val="067D17"/>
+                </a:solidFill>
+                <a:latin typeface="JetBrains Mono"/>
+                <a:ea typeface="JetBrains Mono"/>
+                <a:cs typeface="JetBrains Mono"/>
+              </a:rPr>
+              <a:t>"Initials:"</a:t>
             </a:r>
             <a:r>
               <a:rPr sz="2400" b="0">
+                <a:solidFill>
+                  <a:srgbClr val="080808"/>
+                </a:solidFill>
+                <a:latin typeface="Calibri"/>
+                <a:ea typeface="Calibri"/>
+                <a:cs typeface="Calibri"/>
+              </a:rPr>
+              <a:t>. For example, </a:t>
+            </a:r>
+            <a:r>
+              <a:rPr sz="2050" b="0">
+                <a:solidFill>
+                  <a:srgbClr val="067D17"/>
+                </a:solidFill>
+                <a:latin typeface="JetBrains Mono"/>
+                <a:ea typeface="JetBrains Mono"/>
+                <a:cs typeface="JetBrains Mono"/>
+              </a:rPr>
+              <a:t>"Code"</a:t>
+            </a:r>
+            <a:r>
+              <a:rPr sz="2400" b="0">
+                <a:solidFill>
+                  <a:srgbClr val="080808"/>
+                </a:solidFill>
+                <a:latin typeface="Calibri"/>
+                <a:ea typeface="Calibri"/>
+                <a:cs typeface="Calibri"/>
+              </a:rPr>
+              <a:t> and </a:t>
+            </a:r>
+            <a:r>
+              <a:rPr sz="2050" b="0">
+                <a:solidFill>
+                  <a:srgbClr val="067D17"/>
+                </a:solidFill>
+                <a:latin typeface="JetBrains Mono"/>
+                <a:ea typeface="JetBrains Mono"/>
+                <a:cs typeface="JetBrains Mono"/>
+              </a:rPr>
+              <a:t>"python"</a:t>
+            </a:r>
+            <a:r>
+              <a:rPr sz="2400" b="0">
+                <a:solidFill>
+                  <a:srgbClr val="080808"/>
+                </a:solidFill>
+                <a:latin typeface="Calibri"/>
+                <a:ea typeface="Calibri"/>
+                <a:cs typeface="Calibri"/>
+              </a:rPr>
+              <a:t> display </a:t>
+            </a:r>
+            <a:r>
+              <a:rPr sz="2050" b="0">
                 <a:solidFill>
                   <a:srgbClr val="067D17"/>
                 </a:solidFill>
@@ -7983,18 +8127,21 @@
                 <a:ea typeface="Calibri"/>
                 <a:cs typeface="Calibri"/>
               </a:rPr>
-              <a:t>Ask for a six-letter word and store it in [word]. Store the slice from positions 0 to 2 in [first_part] and the slice from positions 4 to 6 in [last_part]. Display </a:t>
-            </a:r>
-            <a:r>
-              <a:rPr sz="2400" b="0">
-                <a:solidFill>
-                  <a:srgbClr val="067D17"/>
-                </a:solidFill>
-                <a:latin typeface="JetBrains Mono"/>
-                <a:ea typeface="JetBrains Mono"/>
-                <a:cs typeface="JetBrains Mono"/>
-              </a:rPr>
-              <a:t>"Reference:"</a:t>
+              <a:t>Create a reference-code program that asks for a six-letter word. Use two slices to store the first two characters in </a:t>
+            </a:r>
+            <a:r>
+              <a:rPr sz="2050" b="0">
+                <a:solidFill>
+                  <a:srgbClr val="6A1B9A"/>
+                </a:solidFill>
+                <a:highlight>
+                  <a:srgbClr val="ECEAF4"/>
+                </a:highlight>
+                <a:latin typeface="JetBrains Mono"/>
+                <a:ea typeface="JetBrains Mono"/>
+                <a:cs typeface="JetBrains Mono"/>
+              </a:rPr>
+              <a:t> first_part </a:t>
             </a:r>
             <a:r>
               <a:rPr sz="2400" b="0">
@@ -8005,18 +8152,21 @@
                 <a:ea typeface="Calibri"/>
                 <a:cs typeface="Calibri"/>
               </a:rPr>
-              <a:t> followed by both parts. Test </a:t>
-            </a:r>
-            <a:r>
-              <a:rPr sz="2400" b="0">
-                <a:solidFill>
-                  <a:srgbClr val="067D17"/>
-                </a:solidFill>
-                <a:latin typeface="JetBrains Mono"/>
-                <a:ea typeface="JetBrains Mono"/>
-                <a:cs typeface="JetBrains Mono"/>
-              </a:rPr>
-              <a:t>"python"</a:t>
+              <a:t> and the last two in </a:t>
+            </a:r>
+            <a:r>
+              <a:rPr sz="2050" b="0">
+                <a:solidFill>
+                  <a:srgbClr val="6A1B9A"/>
+                </a:solidFill>
+                <a:highlight>
+                  <a:srgbClr val="ECEAF4"/>
+                </a:highlight>
+                <a:latin typeface="JetBrains Mono"/>
+                <a:ea typeface="JetBrains Mono"/>
+                <a:cs typeface="JetBrains Mono"/>
+              </a:rPr>
+              <a:t> last_part </a:t>
             </a:r>
             <a:r>
               <a:rPr sz="2400" b="0">
@@ -8027,10 +8177,54 @@
                 <a:ea typeface="Calibri"/>
                 <a:cs typeface="Calibri"/>
               </a:rPr>
-              <a:t>; display </a:t>
+              <a:t>. Display both after </a:t>
+            </a:r>
+            <a:r>
+              <a:rPr sz="2050" b="0">
+                <a:solidFill>
+                  <a:srgbClr val="067D17"/>
+                </a:solidFill>
+                <a:latin typeface="JetBrains Mono"/>
+                <a:ea typeface="JetBrains Mono"/>
+                <a:cs typeface="JetBrains Mono"/>
+              </a:rPr>
+              <a:t>"Reference:"</a:t>
             </a:r>
             <a:r>
               <a:rPr sz="2400" b="0">
+                <a:solidFill>
+                  <a:srgbClr val="080808"/>
+                </a:solidFill>
+                <a:latin typeface="Calibri"/>
+                <a:ea typeface="Calibri"/>
+                <a:cs typeface="Calibri"/>
+              </a:rPr>
+              <a:t>. For example, </a:t>
+            </a:r>
+            <a:r>
+              <a:rPr sz="2050" b="0">
+                <a:solidFill>
+                  <a:srgbClr val="067D17"/>
+                </a:solidFill>
+                <a:latin typeface="JetBrains Mono"/>
+                <a:ea typeface="JetBrains Mono"/>
+                <a:cs typeface="JetBrains Mono"/>
+              </a:rPr>
+              <a:t>"python"</a:t>
+            </a:r>
+            <a:r>
+              <a:rPr sz="2400" b="0">
+                <a:solidFill>
+                  <a:srgbClr val="080808"/>
+                </a:solidFill>
+                <a:latin typeface="Calibri"/>
+                <a:ea typeface="Calibri"/>
+                <a:cs typeface="Calibri"/>
+              </a:rPr>
+              <a:t> displays </a:t>
+            </a:r>
+            <a:r>
+              <a:rPr sz="2050" b="0">
                 <a:solidFill>
                   <a:srgbClr val="067D17"/>
                 </a:solidFill>

--- a/Mapped Curriculum Lessons/Grade 7/Lesson 13 - String Positions/String Positions - Slides.pptx
+++ b/Mapped Curriculum Lessons/Grade 7/Lesson 13 - String Positions/String Positions - Slides.pptx
@@ -2,28 +2,28 @@
 <file path=ppt/presentation.xml><?xml version="1.0" encoding="utf-8"?>
 <p:presentation xmlns:p="http://schemas.openxmlformats.org/presentationml/2006/main" embedTrueTypeFonts="1" saveSubsetFonts="0">
   <p:sldMasterIdLst>
-    <p:sldMasterId xmlns:r="http://schemas.openxmlformats.org/officeDocument/2006/relationships" id="2147483648" r:id="R9fcd10d632bf4ca9"/>
+    <p:sldMasterId xmlns:r="http://schemas.openxmlformats.org/officeDocument/2006/relationships" id="2147483648" r:id="R8ae2918cd2ca4ebd"/>
   </p:sldMasterIdLst>
   <p:notesMasterIdLst>
-    <p:notesMasterId xmlns:r="http://schemas.openxmlformats.org/officeDocument/2006/relationships" r:id="Rd26e91d133b44066"/>
+    <p:notesMasterId xmlns:r="http://schemas.openxmlformats.org/officeDocument/2006/relationships" r:id="R822410448c524d61"/>
   </p:notesMasterIdLst>
   <p:sldIdLst>
-    <p:sldId xmlns:r="http://schemas.openxmlformats.org/officeDocument/2006/relationships" id="256" r:id="R3424e64927464d12"/>
-    <p:sldId xmlns:r="http://schemas.openxmlformats.org/officeDocument/2006/relationships" id="257" r:id="R3d0ceb49de8c404d"/>
-    <p:sldId xmlns:r="http://schemas.openxmlformats.org/officeDocument/2006/relationships" id="258" r:id="R3668421a5a124759"/>
-    <p:sldId xmlns:r="http://schemas.openxmlformats.org/officeDocument/2006/relationships" id="259" r:id="R5d05ce2495b44c31"/>
-    <p:sldId xmlns:r="http://schemas.openxmlformats.org/officeDocument/2006/relationships" id="260" r:id="Raee880242d034754"/>
-    <p:sldId xmlns:r="http://schemas.openxmlformats.org/officeDocument/2006/relationships" id="261" r:id="R22100d0941fa4785"/>
-    <p:sldId xmlns:r="http://schemas.openxmlformats.org/officeDocument/2006/relationships" id="262" r:id="R0d6cf9838adc4dc8"/>
-    <p:sldId xmlns:r="http://schemas.openxmlformats.org/officeDocument/2006/relationships" id="263" r:id="R8a809d6386fb4d19"/>
-    <p:sldId xmlns:r="http://schemas.openxmlformats.org/officeDocument/2006/relationships" id="264" r:id="R931a5bc4b9694088"/>
+    <p:sldId xmlns:r="http://schemas.openxmlformats.org/officeDocument/2006/relationships" id="256" r:id="Rfbf41cef8c68474c"/>
+    <p:sldId xmlns:r="http://schemas.openxmlformats.org/officeDocument/2006/relationships" id="257" r:id="R35c918a6d3bc4ac8"/>
+    <p:sldId xmlns:r="http://schemas.openxmlformats.org/officeDocument/2006/relationships" id="258" r:id="R6c4f63a6f8394658"/>
+    <p:sldId xmlns:r="http://schemas.openxmlformats.org/officeDocument/2006/relationships" id="259" r:id="R0829f0d10c5e437f"/>
+    <p:sldId xmlns:r="http://schemas.openxmlformats.org/officeDocument/2006/relationships" id="260" r:id="Re08abca735d840a6"/>
+    <p:sldId xmlns:r="http://schemas.openxmlformats.org/officeDocument/2006/relationships" id="261" r:id="R54e1a6ba55a04f28"/>
+    <p:sldId xmlns:r="http://schemas.openxmlformats.org/officeDocument/2006/relationships" id="262" r:id="R8b3990ee948144d4"/>
+    <p:sldId xmlns:r="http://schemas.openxmlformats.org/officeDocument/2006/relationships" id="263" r:id="R983b031e7b3e44b0"/>
+    <p:sldId xmlns:r="http://schemas.openxmlformats.org/officeDocument/2006/relationships" id="264" r:id="R80c5096259cf4765"/>
   </p:sldIdLst>
   <p:sldSz cx="12192000" cy="6858000"/>
   <p:notesSz cx="6858000" cy="9144000"/>
   <p:embeddedFontLst>
     <p:embeddedFont>
       <p:font typeface="JetBrains Mono"/>
-      <p:regular xmlns:r="http://schemas.openxmlformats.org/officeDocument/2006/relationships" r:id="R4713141cab4a4775"/>
+      <p:regular xmlns:r="http://schemas.openxmlformats.org/officeDocument/2006/relationships" r:id="Rfe06fe72cd7e4be4"/>
     </p:embeddedFont>
   </p:embeddedFontLst>
 </p:presentation>
@@ -1071,7 +1071,7 @@
           <p:nvPr/>
         </p:nvPicPr>
         <p:blipFill rotWithShape="1">
-          <a:blip xmlns:r="http://schemas.openxmlformats.org/officeDocument/2006/relationships" xmlns:a="http://schemas.openxmlformats.org/drawingml/2006/main" r:embed="Rf7ad3a2cd07e430d"/>
+          <a:blip xmlns:r="http://schemas.openxmlformats.org/officeDocument/2006/relationships" xmlns:a="http://schemas.openxmlformats.org/drawingml/2006/main" r:embed="R2559e8c1e11f4517"/>
           <a:stretch xmlns:a="http://schemas.openxmlformats.org/drawingml/2006/main"/>
         </p:blipFill>
         <p:spPr>
@@ -1451,7 +1451,7 @@
           <p:nvPr/>
         </p:nvPicPr>
         <p:blipFill rotWithShape="1">
-          <a:blip xmlns:r="http://schemas.openxmlformats.org/officeDocument/2006/relationships" xmlns:a="http://schemas.openxmlformats.org/drawingml/2006/main" r:embed="R9d6bfbfc83094e07">
+          <a:blip xmlns:r="http://schemas.openxmlformats.org/officeDocument/2006/relationships" xmlns:a="http://schemas.openxmlformats.org/drawingml/2006/main" r:embed="Re71f080954d34619">
             <a:alphaModFix amt="28000"/>
           </a:blip>
           <a:stretch xmlns:a="http://schemas.openxmlformats.org/drawingml/2006/main"/>
@@ -1664,7 +1664,7 @@
           <p:nvPr/>
         </p:nvPicPr>
         <p:blipFill rotWithShape="1">
-          <a:blip xmlns:r="http://schemas.openxmlformats.org/officeDocument/2006/relationships" xmlns:a="http://schemas.openxmlformats.org/drawingml/2006/main" r:embed="R667ec418d58d46a0">
+          <a:blip xmlns:r="http://schemas.openxmlformats.org/officeDocument/2006/relationships" xmlns:a="http://schemas.openxmlformats.org/drawingml/2006/main" r:embed="R37136350883f4b66">
             <a:alphaModFix amt="28000"/>
           </a:blip>
           <a:stretch xmlns:a="http://schemas.openxmlformats.org/drawingml/2006/main"/>
@@ -1899,7 +1899,7 @@
           <p:nvPr/>
         </p:nvPicPr>
         <p:blipFill rotWithShape="1">
-          <a:blip xmlns:r="http://schemas.openxmlformats.org/officeDocument/2006/relationships" xmlns:a="http://schemas.openxmlformats.org/drawingml/2006/main" r:embed="Rb5300cfc0e3c471a">
+          <a:blip xmlns:r="http://schemas.openxmlformats.org/officeDocument/2006/relationships" xmlns:a="http://schemas.openxmlformats.org/drawingml/2006/main" r:embed="R5ebd5546c9bc4bfd">
             <a:alphaModFix amt="28000"/>
           </a:blip>
           <a:stretch xmlns:a="http://schemas.openxmlformats.org/drawingml/2006/main"/>
@@ -2176,7 +2176,7 @@
           <p:nvPr/>
         </p:nvPicPr>
         <p:blipFill rotWithShape="1">
-          <a:blip xmlns:r="http://schemas.openxmlformats.org/officeDocument/2006/relationships" xmlns:a="http://schemas.openxmlformats.org/drawingml/2006/main" r:embed="Re8d948e6a1a945a3">
+          <a:blip xmlns:r="http://schemas.openxmlformats.org/officeDocument/2006/relationships" xmlns:a="http://schemas.openxmlformats.org/drawingml/2006/main" r:embed="R796f10db3a26400e">
             <a:alphaModFix amt="28000"/>
           </a:blip>
           <a:stretch xmlns:a="http://schemas.openxmlformats.org/drawingml/2006/main"/>
@@ -2451,7 +2451,7 @@
           <p:nvPr/>
         </p:nvPicPr>
         <p:blipFill rotWithShape="1">
-          <a:blip xmlns:r="http://schemas.openxmlformats.org/officeDocument/2006/relationships" xmlns:a="http://schemas.openxmlformats.org/drawingml/2006/main" r:embed="R25d35cbad7fb4e43">
+          <a:blip xmlns:r="http://schemas.openxmlformats.org/officeDocument/2006/relationships" xmlns:a="http://schemas.openxmlformats.org/drawingml/2006/main" r:embed="Rb8b712b384a041c1">
             <a:alphaModFix amt="28000"/>
           </a:blip>
           <a:stretch xmlns:a="http://schemas.openxmlformats.org/drawingml/2006/main"/>
@@ -2875,7 +2875,7 @@
           <p:nvPr/>
         </p:nvPicPr>
         <p:blipFill rotWithShape="1">
-          <a:blip xmlns:r="http://schemas.openxmlformats.org/officeDocument/2006/relationships" xmlns:a="http://schemas.openxmlformats.org/drawingml/2006/main" r:embed="Racd7f14b1f5f423f">
+          <a:blip xmlns:r="http://schemas.openxmlformats.org/officeDocument/2006/relationships" xmlns:a="http://schemas.openxmlformats.org/drawingml/2006/main" r:embed="R463e7957c1ab41f8">
             <a:alphaModFix amt="28000"/>
           </a:blip>
           <a:stretch xmlns:a="http://schemas.openxmlformats.org/drawingml/2006/main"/>
@@ -3016,7 +3016,7 @@
           <p:nvPr/>
         </p:nvPicPr>
         <p:blipFill rotWithShape="1">
-          <a:blip xmlns:r="http://schemas.openxmlformats.org/officeDocument/2006/relationships" xmlns:a="http://schemas.openxmlformats.org/drawingml/2006/main" r:embed="R016f943a8c3a44b0">
+          <a:blip xmlns:r="http://schemas.openxmlformats.org/officeDocument/2006/relationships" xmlns:a="http://schemas.openxmlformats.org/drawingml/2006/main" r:embed="R776fdeddc2784dd0">
             <a:alphaModFix amt="28000"/>
           </a:blip>
           <a:stretch xmlns:a="http://schemas.openxmlformats.org/drawingml/2006/main"/>
@@ -3130,7 +3130,7 @@
           <p:nvPr/>
         </p:nvPicPr>
         <p:blipFill rotWithShape="1">
-          <a:blip xmlns:r="http://schemas.openxmlformats.org/officeDocument/2006/relationships" xmlns:a="http://schemas.openxmlformats.org/drawingml/2006/main" r:embed="R1e05c1d60cb94741">
+          <a:blip xmlns:r="http://schemas.openxmlformats.org/officeDocument/2006/relationships" xmlns:a="http://schemas.openxmlformats.org/drawingml/2006/main" r:embed="R7b02962cd7664048">
             <a:alphaModFix amt="28000"/>
           </a:blip>
           <a:stretch xmlns:a="http://schemas.openxmlformats.org/drawingml/2006/main"/>
@@ -3457,7 +3457,7 @@
           <p:nvPr/>
         </p:nvPicPr>
         <p:blipFill rotWithShape="1">
-          <a:blip xmlns:r="http://schemas.openxmlformats.org/officeDocument/2006/relationships" xmlns:a="http://schemas.openxmlformats.org/drawingml/2006/main" r:embed="Rb5b96bf696a940bb">
+          <a:blip xmlns:r="http://schemas.openxmlformats.org/officeDocument/2006/relationships" xmlns:a="http://schemas.openxmlformats.org/drawingml/2006/main" r:embed="R03247521f7d44095">
             <a:alphaModFix amt="28000"/>
           </a:blip>
           <a:stretch xmlns:a="http://schemas.openxmlformats.org/drawingml/2006/main"/>
@@ -3745,7 +3745,7 @@
           <p:nvPr/>
         </p:nvPicPr>
         <p:blipFill rotWithShape="1">
-          <a:blip xmlns:r="http://schemas.openxmlformats.org/officeDocument/2006/relationships" xmlns:a="http://schemas.openxmlformats.org/drawingml/2006/main" r:embed="R62fa1e2ea14a4b4d">
+          <a:blip xmlns:r="http://schemas.openxmlformats.org/officeDocument/2006/relationships" xmlns:a="http://schemas.openxmlformats.org/drawingml/2006/main" r:embed="R96dd5e5008b64fb6">
             <a:alphaModFix amt="28000"/>
           </a:blip>
           <a:stretch xmlns:a="http://schemas.openxmlformats.org/drawingml/2006/main"/>
@@ -3982,17 +3982,17 @@
   </p:cSld>
   <p:clrMap bg1="lt1" tx1="dk1" bg2="lt2" tx2="dk2" accent1="accent1" accent2="accent2" accent3="accent3" accent4="accent4" accent5="accent5" accent6="accent6" hlink="hlink" folHlink="folHlink"/>
   <p:sldLayoutIdLst>
-    <p:sldLayoutId xmlns:r="http://schemas.openxmlformats.org/officeDocument/2006/relationships" id="2147483649" r:id="R1d8aad6f27a64118"/>
-    <p:sldLayoutId xmlns:r="http://schemas.openxmlformats.org/officeDocument/2006/relationships" id="2147483650" r:id="Re6afd97150904991"/>
-    <p:sldLayoutId xmlns:r="http://schemas.openxmlformats.org/officeDocument/2006/relationships" id="2147483651" r:id="Rc150e1cdac744b89"/>
-    <p:sldLayoutId xmlns:r="http://schemas.openxmlformats.org/officeDocument/2006/relationships" id="2147483652" r:id="R8fac4a03d5d14b5f"/>
-    <p:sldLayoutId xmlns:r="http://schemas.openxmlformats.org/officeDocument/2006/relationships" id="2147483653" r:id="R3c3fb805611245f1"/>
-    <p:sldLayoutId xmlns:r="http://schemas.openxmlformats.org/officeDocument/2006/relationships" id="2147483654" r:id="R1b17ba1dc4e04ebe"/>
-    <p:sldLayoutId xmlns:r="http://schemas.openxmlformats.org/officeDocument/2006/relationships" id="2147483655" r:id="Rb5e8d713bac044b5"/>
-    <p:sldLayoutId xmlns:r="http://schemas.openxmlformats.org/officeDocument/2006/relationships" id="2147483656" r:id="R01254f457aec40d2"/>
-    <p:sldLayoutId xmlns:r="http://schemas.openxmlformats.org/officeDocument/2006/relationships" id="2147483657" r:id="R054fc79feaa24f0c"/>
-    <p:sldLayoutId xmlns:r="http://schemas.openxmlformats.org/officeDocument/2006/relationships" id="2147483658" r:id="Raa67a8df59824fff"/>
-    <p:sldLayoutId xmlns:r="http://schemas.openxmlformats.org/officeDocument/2006/relationships" id="2147483659" r:id="R67a2b793053344b4"/>
+    <p:sldLayoutId xmlns:r="http://schemas.openxmlformats.org/officeDocument/2006/relationships" id="2147483649" r:id="R31375f4e8ea34427"/>
+    <p:sldLayoutId xmlns:r="http://schemas.openxmlformats.org/officeDocument/2006/relationships" id="2147483650" r:id="R76fbbdcab4c147d6"/>
+    <p:sldLayoutId xmlns:r="http://schemas.openxmlformats.org/officeDocument/2006/relationships" id="2147483651" r:id="R4afbc124f57a4ef8"/>
+    <p:sldLayoutId xmlns:r="http://schemas.openxmlformats.org/officeDocument/2006/relationships" id="2147483652" r:id="R2bdb3bef478c4384"/>
+    <p:sldLayoutId xmlns:r="http://schemas.openxmlformats.org/officeDocument/2006/relationships" id="2147483653" r:id="R0513aec6f3454c9f"/>
+    <p:sldLayoutId xmlns:r="http://schemas.openxmlformats.org/officeDocument/2006/relationships" id="2147483654" r:id="Rb9c9e53bd237443b"/>
+    <p:sldLayoutId xmlns:r="http://schemas.openxmlformats.org/officeDocument/2006/relationships" id="2147483655" r:id="Rbae6713ff0934ff0"/>
+    <p:sldLayoutId xmlns:r="http://schemas.openxmlformats.org/officeDocument/2006/relationships" id="2147483656" r:id="R9c919d576a4a4e71"/>
+    <p:sldLayoutId xmlns:r="http://schemas.openxmlformats.org/officeDocument/2006/relationships" id="2147483657" r:id="R8ae51adc8bb34a5b"/>
+    <p:sldLayoutId xmlns:r="http://schemas.openxmlformats.org/officeDocument/2006/relationships" id="2147483658" r:id="R47a643948f664729"/>
+    <p:sldLayoutId xmlns:r="http://schemas.openxmlformats.org/officeDocument/2006/relationships" id="2147483659" r:id="R14f94ef1b7ef42c2"/>
   </p:sldLayoutIdLst>
   <p:hf hdr="0" ftr="0" dt="0"/>
   <p:txStyles>

--- a/Mapped Curriculum Lessons/Grade 7/Lesson 13 - String Positions/String Positions - Slides.pptx
+++ b/Mapped Curriculum Lessons/Grade 7/Lesson 13 - String Positions/String Positions - Slides.pptx
@@ -2,28 +2,28 @@
 <file path=ppt/presentation.xml><?xml version="1.0" encoding="utf-8"?>
 <p:presentation xmlns:p="http://schemas.openxmlformats.org/presentationml/2006/main" embedTrueTypeFonts="1" saveSubsetFonts="0">
   <p:sldMasterIdLst>
-    <p:sldMasterId xmlns:r="http://schemas.openxmlformats.org/officeDocument/2006/relationships" id="2147483648" r:id="R8ae2918cd2ca4ebd"/>
+    <p:sldMasterId xmlns:r="http://schemas.openxmlformats.org/officeDocument/2006/relationships" id="2147483648" r:id="Rc69bfd27c65642af"/>
   </p:sldMasterIdLst>
   <p:notesMasterIdLst>
-    <p:notesMasterId xmlns:r="http://schemas.openxmlformats.org/officeDocument/2006/relationships" r:id="R822410448c524d61"/>
+    <p:notesMasterId xmlns:r="http://schemas.openxmlformats.org/officeDocument/2006/relationships" r:id="R144fd211dfa14d2c"/>
   </p:notesMasterIdLst>
   <p:sldIdLst>
-    <p:sldId xmlns:r="http://schemas.openxmlformats.org/officeDocument/2006/relationships" id="256" r:id="Rfbf41cef8c68474c"/>
-    <p:sldId xmlns:r="http://schemas.openxmlformats.org/officeDocument/2006/relationships" id="257" r:id="R35c918a6d3bc4ac8"/>
-    <p:sldId xmlns:r="http://schemas.openxmlformats.org/officeDocument/2006/relationships" id="258" r:id="R6c4f63a6f8394658"/>
-    <p:sldId xmlns:r="http://schemas.openxmlformats.org/officeDocument/2006/relationships" id="259" r:id="R0829f0d10c5e437f"/>
-    <p:sldId xmlns:r="http://schemas.openxmlformats.org/officeDocument/2006/relationships" id="260" r:id="Re08abca735d840a6"/>
-    <p:sldId xmlns:r="http://schemas.openxmlformats.org/officeDocument/2006/relationships" id="261" r:id="R54e1a6ba55a04f28"/>
-    <p:sldId xmlns:r="http://schemas.openxmlformats.org/officeDocument/2006/relationships" id="262" r:id="R8b3990ee948144d4"/>
-    <p:sldId xmlns:r="http://schemas.openxmlformats.org/officeDocument/2006/relationships" id="263" r:id="R983b031e7b3e44b0"/>
-    <p:sldId xmlns:r="http://schemas.openxmlformats.org/officeDocument/2006/relationships" id="264" r:id="R80c5096259cf4765"/>
+    <p:sldId xmlns:r="http://schemas.openxmlformats.org/officeDocument/2006/relationships" id="256" r:id="R9a9c30541f9e4dbb"/>
+    <p:sldId xmlns:r="http://schemas.openxmlformats.org/officeDocument/2006/relationships" id="257" r:id="R2834867b75664bf7"/>
+    <p:sldId xmlns:r="http://schemas.openxmlformats.org/officeDocument/2006/relationships" id="258" r:id="Rd5444480916b4e1d"/>
+    <p:sldId xmlns:r="http://schemas.openxmlformats.org/officeDocument/2006/relationships" id="259" r:id="Re4870c52930245d5"/>
+    <p:sldId xmlns:r="http://schemas.openxmlformats.org/officeDocument/2006/relationships" id="260" r:id="R4307b95c5b974414"/>
+    <p:sldId xmlns:r="http://schemas.openxmlformats.org/officeDocument/2006/relationships" id="261" r:id="R49f5fd7e209d480a"/>
+    <p:sldId xmlns:r="http://schemas.openxmlformats.org/officeDocument/2006/relationships" id="262" r:id="R4546cbb1b7124e05"/>
+    <p:sldId xmlns:r="http://schemas.openxmlformats.org/officeDocument/2006/relationships" id="263" r:id="R1fb4fe1cda1346d7"/>
+    <p:sldId xmlns:r="http://schemas.openxmlformats.org/officeDocument/2006/relationships" id="264" r:id="Rc71964138a5e44e7"/>
   </p:sldIdLst>
   <p:sldSz cx="12192000" cy="6858000"/>
   <p:notesSz cx="6858000" cy="9144000"/>
   <p:embeddedFontLst>
     <p:embeddedFont>
       <p:font typeface="JetBrains Mono"/>
-      <p:regular xmlns:r="http://schemas.openxmlformats.org/officeDocument/2006/relationships" r:id="Rfe06fe72cd7e4be4"/>
+      <p:regular xmlns:r="http://schemas.openxmlformats.org/officeDocument/2006/relationships" r:id="Rd5b4d74466cc41af"/>
     </p:embeddedFont>
   </p:embeddedFontLst>
 </p:presentation>
@@ -1071,7 +1071,7 @@
           <p:nvPr/>
         </p:nvPicPr>
         <p:blipFill rotWithShape="1">
-          <a:blip xmlns:r="http://schemas.openxmlformats.org/officeDocument/2006/relationships" xmlns:a="http://schemas.openxmlformats.org/drawingml/2006/main" r:embed="R2559e8c1e11f4517"/>
+          <a:blip xmlns:r="http://schemas.openxmlformats.org/officeDocument/2006/relationships" xmlns:a="http://schemas.openxmlformats.org/drawingml/2006/main" r:embed="R3e5ad0e7008644d2"/>
           <a:stretch xmlns:a="http://schemas.openxmlformats.org/drawingml/2006/main"/>
         </p:blipFill>
         <p:spPr>
@@ -1451,7 +1451,7 @@
           <p:nvPr/>
         </p:nvPicPr>
         <p:blipFill rotWithShape="1">
-          <a:blip xmlns:r="http://schemas.openxmlformats.org/officeDocument/2006/relationships" xmlns:a="http://schemas.openxmlformats.org/drawingml/2006/main" r:embed="Re71f080954d34619">
+          <a:blip xmlns:r="http://schemas.openxmlformats.org/officeDocument/2006/relationships" xmlns:a="http://schemas.openxmlformats.org/drawingml/2006/main" r:embed="R052e84e5a6114075">
             <a:alphaModFix amt="28000"/>
           </a:blip>
           <a:stretch xmlns:a="http://schemas.openxmlformats.org/drawingml/2006/main"/>
@@ -1664,7 +1664,7 @@
           <p:nvPr/>
         </p:nvPicPr>
         <p:blipFill rotWithShape="1">
-          <a:blip xmlns:r="http://schemas.openxmlformats.org/officeDocument/2006/relationships" xmlns:a="http://schemas.openxmlformats.org/drawingml/2006/main" r:embed="R37136350883f4b66">
+          <a:blip xmlns:r="http://schemas.openxmlformats.org/officeDocument/2006/relationships" xmlns:a="http://schemas.openxmlformats.org/drawingml/2006/main" r:embed="Re64b2b5b6008467c">
             <a:alphaModFix amt="28000"/>
           </a:blip>
           <a:stretch xmlns:a="http://schemas.openxmlformats.org/drawingml/2006/main"/>
@@ -1899,7 +1899,7 @@
           <p:nvPr/>
         </p:nvPicPr>
         <p:blipFill rotWithShape="1">
-          <a:blip xmlns:r="http://schemas.openxmlformats.org/officeDocument/2006/relationships" xmlns:a="http://schemas.openxmlformats.org/drawingml/2006/main" r:embed="R5ebd5546c9bc4bfd">
+          <a:blip xmlns:r="http://schemas.openxmlformats.org/officeDocument/2006/relationships" xmlns:a="http://schemas.openxmlformats.org/drawingml/2006/main" r:embed="R147045f61e454781">
             <a:alphaModFix amt="28000"/>
           </a:blip>
           <a:stretch xmlns:a="http://schemas.openxmlformats.org/drawingml/2006/main"/>
@@ -2176,7 +2176,7 @@
           <p:nvPr/>
         </p:nvPicPr>
         <p:blipFill rotWithShape="1">
-          <a:blip xmlns:r="http://schemas.openxmlformats.org/officeDocument/2006/relationships" xmlns:a="http://schemas.openxmlformats.org/drawingml/2006/main" r:embed="R796f10db3a26400e">
+          <a:blip xmlns:r="http://schemas.openxmlformats.org/officeDocument/2006/relationships" xmlns:a="http://schemas.openxmlformats.org/drawingml/2006/main" r:embed="R3a44064e7abb4afb">
             <a:alphaModFix amt="28000"/>
           </a:blip>
           <a:stretch xmlns:a="http://schemas.openxmlformats.org/drawingml/2006/main"/>
@@ -2451,7 +2451,7 @@
           <p:nvPr/>
         </p:nvPicPr>
         <p:blipFill rotWithShape="1">
-          <a:blip xmlns:r="http://schemas.openxmlformats.org/officeDocument/2006/relationships" xmlns:a="http://schemas.openxmlformats.org/drawingml/2006/main" r:embed="Rb8b712b384a041c1">
+          <a:blip xmlns:r="http://schemas.openxmlformats.org/officeDocument/2006/relationships" xmlns:a="http://schemas.openxmlformats.org/drawingml/2006/main" r:embed="Rb11a351602f845ca">
             <a:alphaModFix amt="28000"/>
           </a:blip>
           <a:stretch xmlns:a="http://schemas.openxmlformats.org/drawingml/2006/main"/>
@@ -2875,7 +2875,7 @@
           <p:nvPr/>
         </p:nvPicPr>
         <p:blipFill rotWithShape="1">
-          <a:blip xmlns:r="http://schemas.openxmlformats.org/officeDocument/2006/relationships" xmlns:a="http://schemas.openxmlformats.org/drawingml/2006/main" r:embed="R463e7957c1ab41f8">
+          <a:blip xmlns:r="http://schemas.openxmlformats.org/officeDocument/2006/relationships" xmlns:a="http://schemas.openxmlformats.org/drawingml/2006/main" r:embed="R2dd06b60cc754bcd">
             <a:alphaModFix amt="28000"/>
           </a:blip>
           <a:stretch xmlns:a="http://schemas.openxmlformats.org/drawingml/2006/main"/>
@@ -3016,7 +3016,7 @@
           <p:nvPr/>
         </p:nvPicPr>
         <p:blipFill rotWithShape="1">
-          <a:blip xmlns:r="http://schemas.openxmlformats.org/officeDocument/2006/relationships" xmlns:a="http://schemas.openxmlformats.org/drawingml/2006/main" r:embed="R776fdeddc2784dd0">
+          <a:blip xmlns:r="http://schemas.openxmlformats.org/officeDocument/2006/relationships" xmlns:a="http://schemas.openxmlformats.org/drawingml/2006/main" r:embed="R6304f51cd2a74d99">
             <a:alphaModFix amt="28000"/>
           </a:blip>
           <a:stretch xmlns:a="http://schemas.openxmlformats.org/drawingml/2006/main"/>
@@ -3130,7 +3130,7 @@
           <p:nvPr/>
         </p:nvPicPr>
         <p:blipFill rotWithShape="1">
-          <a:blip xmlns:r="http://schemas.openxmlformats.org/officeDocument/2006/relationships" xmlns:a="http://schemas.openxmlformats.org/drawingml/2006/main" r:embed="R7b02962cd7664048">
+          <a:blip xmlns:r="http://schemas.openxmlformats.org/officeDocument/2006/relationships" xmlns:a="http://schemas.openxmlformats.org/drawingml/2006/main" r:embed="Rf1e8487ad4ed4f17">
             <a:alphaModFix amt="28000"/>
           </a:blip>
           <a:stretch xmlns:a="http://schemas.openxmlformats.org/drawingml/2006/main"/>
@@ -3457,7 +3457,7 @@
           <p:nvPr/>
         </p:nvPicPr>
         <p:blipFill rotWithShape="1">
-          <a:blip xmlns:r="http://schemas.openxmlformats.org/officeDocument/2006/relationships" xmlns:a="http://schemas.openxmlformats.org/drawingml/2006/main" r:embed="R03247521f7d44095">
+          <a:blip xmlns:r="http://schemas.openxmlformats.org/officeDocument/2006/relationships" xmlns:a="http://schemas.openxmlformats.org/drawingml/2006/main" r:embed="Rfd455903644d450c">
             <a:alphaModFix amt="28000"/>
           </a:blip>
           <a:stretch xmlns:a="http://schemas.openxmlformats.org/drawingml/2006/main"/>
@@ -3745,7 +3745,7 @@
           <p:nvPr/>
         </p:nvPicPr>
         <p:blipFill rotWithShape="1">
-          <a:blip xmlns:r="http://schemas.openxmlformats.org/officeDocument/2006/relationships" xmlns:a="http://schemas.openxmlformats.org/drawingml/2006/main" r:embed="R96dd5e5008b64fb6">
+          <a:blip xmlns:r="http://schemas.openxmlformats.org/officeDocument/2006/relationships" xmlns:a="http://schemas.openxmlformats.org/drawingml/2006/main" r:embed="Rfe574800f1b342ec">
             <a:alphaModFix amt="28000"/>
           </a:blip>
           <a:stretch xmlns:a="http://schemas.openxmlformats.org/drawingml/2006/main"/>
@@ -3982,17 +3982,17 @@
   </p:cSld>
   <p:clrMap bg1="lt1" tx1="dk1" bg2="lt2" tx2="dk2" accent1="accent1" accent2="accent2" accent3="accent3" accent4="accent4" accent5="accent5" accent6="accent6" hlink="hlink" folHlink="folHlink"/>
   <p:sldLayoutIdLst>
-    <p:sldLayoutId xmlns:r="http://schemas.openxmlformats.org/officeDocument/2006/relationships" id="2147483649" r:id="R31375f4e8ea34427"/>
-    <p:sldLayoutId xmlns:r="http://schemas.openxmlformats.org/officeDocument/2006/relationships" id="2147483650" r:id="R76fbbdcab4c147d6"/>
-    <p:sldLayoutId xmlns:r="http://schemas.openxmlformats.org/officeDocument/2006/relationships" id="2147483651" r:id="R4afbc124f57a4ef8"/>
-    <p:sldLayoutId xmlns:r="http://schemas.openxmlformats.org/officeDocument/2006/relationships" id="2147483652" r:id="R2bdb3bef478c4384"/>
-    <p:sldLayoutId xmlns:r="http://schemas.openxmlformats.org/officeDocument/2006/relationships" id="2147483653" r:id="R0513aec6f3454c9f"/>
-    <p:sldLayoutId xmlns:r="http://schemas.openxmlformats.org/officeDocument/2006/relationships" id="2147483654" r:id="Rb9c9e53bd237443b"/>
-    <p:sldLayoutId xmlns:r="http://schemas.openxmlformats.org/officeDocument/2006/relationships" id="2147483655" r:id="Rbae6713ff0934ff0"/>
-    <p:sldLayoutId xmlns:r="http://schemas.openxmlformats.org/officeDocument/2006/relationships" id="2147483656" r:id="R9c919d576a4a4e71"/>
-    <p:sldLayoutId xmlns:r="http://schemas.openxmlformats.org/officeDocument/2006/relationships" id="2147483657" r:id="R8ae51adc8bb34a5b"/>
-    <p:sldLayoutId xmlns:r="http://schemas.openxmlformats.org/officeDocument/2006/relationships" id="2147483658" r:id="R47a643948f664729"/>
-    <p:sldLayoutId xmlns:r="http://schemas.openxmlformats.org/officeDocument/2006/relationships" id="2147483659" r:id="R14f94ef1b7ef42c2"/>
+    <p:sldLayoutId xmlns:r="http://schemas.openxmlformats.org/officeDocument/2006/relationships" id="2147483649" r:id="R0d96cf91ee17417f"/>
+    <p:sldLayoutId xmlns:r="http://schemas.openxmlformats.org/officeDocument/2006/relationships" id="2147483650" r:id="Rfec5824ad5c849f6"/>
+    <p:sldLayoutId xmlns:r="http://schemas.openxmlformats.org/officeDocument/2006/relationships" id="2147483651" r:id="Rc7b34f816c6b4d31"/>
+    <p:sldLayoutId xmlns:r="http://schemas.openxmlformats.org/officeDocument/2006/relationships" id="2147483652" r:id="R071185eedad94444"/>
+    <p:sldLayoutId xmlns:r="http://schemas.openxmlformats.org/officeDocument/2006/relationships" id="2147483653" r:id="Rb72c100f99714e82"/>
+    <p:sldLayoutId xmlns:r="http://schemas.openxmlformats.org/officeDocument/2006/relationships" id="2147483654" r:id="Rea749b5072124e34"/>
+    <p:sldLayoutId xmlns:r="http://schemas.openxmlformats.org/officeDocument/2006/relationships" id="2147483655" r:id="R6d239363c6cc452c"/>
+    <p:sldLayoutId xmlns:r="http://schemas.openxmlformats.org/officeDocument/2006/relationships" id="2147483656" r:id="R7ffabef58a06420a"/>
+    <p:sldLayoutId xmlns:r="http://schemas.openxmlformats.org/officeDocument/2006/relationships" id="2147483657" r:id="R776e50c0c1854bf7"/>
+    <p:sldLayoutId xmlns:r="http://schemas.openxmlformats.org/officeDocument/2006/relationships" id="2147483658" r:id="R33b1cd6c30ce4e2a"/>
+    <p:sldLayoutId xmlns:r="http://schemas.openxmlformats.org/officeDocument/2006/relationships" id="2147483659" r:id="Rfaf62a80e8ea4b25"/>
   </p:sldLayoutIdLst>
   <p:hf hdr="0" ftr="0" dt="0"/>
   <p:txStyles>

--- a/Mapped Curriculum Lessons/Grade 7/Lesson 13 - String Positions/String Positions - Slides.pptx
+++ b/Mapped Curriculum Lessons/Grade 7/Lesson 13 - String Positions/String Positions - Slides.pptx
@@ -2,28 +2,28 @@
 <file path=ppt/presentation.xml><?xml version="1.0" encoding="utf-8"?>
 <p:presentation xmlns:p="http://schemas.openxmlformats.org/presentationml/2006/main" embedTrueTypeFonts="1" saveSubsetFonts="0">
   <p:sldMasterIdLst>
-    <p:sldMasterId xmlns:r="http://schemas.openxmlformats.org/officeDocument/2006/relationships" id="2147483648" r:id="Rc69bfd27c65642af"/>
+    <p:sldMasterId xmlns:r="http://schemas.openxmlformats.org/officeDocument/2006/relationships" id="2147483648" r:id="R089278cb9cad4e85"/>
   </p:sldMasterIdLst>
   <p:notesMasterIdLst>
-    <p:notesMasterId xmlns:r="http://schemas.openxmlformats.org/officeDocument/2006/relationships" r:id="R144fd211dfa14d2c"/>
+    <p:notesMasterId xmlns:r="http://schemas.openxmlformats.org/officeDocument/2006/relationships" r:id="R69f3423b038c422c"/>
   </p:notesMasterIdLst>
   <p:sldIdLst>
-    <p:sldId xmlns:r="http://schemas.openxmlformats.org/officeDocument/2006/relationships" id="256" r:id="R9a9c30541f9e4dbb"/>
-    <p:sldId xmlns:r="http://schemas.openxmlformats.org/officeDocument/2006/relationships" id="257" r:id="R2834867b75664bf7"/>
-    <p:sldId xmlns:r="http://schemas.openxmlformats.org/officeDocument/2006/relationships" id="258" r:id="Rd5444480916b4e1d"/>
-    <p:sldId xmlns:r="http://schemas.openxmlformats.org/officeDocument/2006/relationships" id="259" r:id="Re4870c52930245d5"/>
-    <p:sldId xmlns:r="http://schemas.openxmlformats.org/officeDocument/2006/relationships" id="260" r:id="R4307b95c5b974414"/>
-    <p:sldId xmlns:r="http://schemas.openxmlformats.org/officeDocument/2006/relationships" id="261" r:id="R49f5fd7e209d480a"/>
-    <p:sldId xmlns:r="http://schemas.openxmlformats.org/officeDocument/2006/relationships" id="262" r:id="R4546cbb1b7124e05"/>
-    <p:sldId xmlns:r="http://schemas.openxmlformats.org/officeDocument/2006/relationships" id="263" r:id="R1fb4fe1cda1346d7"/>
-    <p:sldId xmlns:r="http://schemas.openxmlformats.org/officeDocument/2006/relationships" id="264" r:id="Rc71964138a5e44e7"/>
+    <p:sldId xmlns:r="http://schemas.openxmlformats.org/officeDocument/2006/relationships" id="256" r:id="Rfe9a773f060b439d"/>
+    <p:sldId xmlns:r="http://schemas.openxmlformats.org/officeDocument/2006/relationships" id="257" r:id="R4342220303424998"/>
+    <p:sldId xmlns:r="http://schemas.openxmlformats.org/officeDocument/2006/relationships" id="258" r:id="R52ef81adb99a4fb7"/>
+    <p:sldId xmlns:r="http://schemas.openxmlformats.org/officeDocument/2006/relationships" id="259" r:id="R0d6e89df0b274a68"/>
+    <p:sldId xmlns:r="http://schemas.openxmlformats.org/officeDocument/2006/relationships" id="260" r:id="R16430dd616824a44"/>
+    <p:sldId xmlns:r="http://schemas.openxmlformats.org/officeDocument/2006/relationships" id="261" r:id="Rc98800f96e3c44a3"/>
+    <p:sldId xmlns:r="http://schemas.openxmlformats.org/officeDocument/2006/relationships" id="262" r:id="Rd8b1ed7f3e134bc7"/>
+    <p:sldId xmlns:r="http://schemas.openxmlformats.org/officeDocument/2006/relationships" id="263" r:id="R01809a359494438d"/>
+    <p:sldId xmlns:r="http://schemas.openxmlformats.org/officeDocument/2006/relationships" id="264" r:id="R806e637ab69540ae"/>
   </p:sldIdLst>
   <p:sldSz cx="12192000" cy="6858000"/>
   <p:notesSz cx="6858000" cy="9144000"/>
   <p:embeddedFontLst>
     <p:embeddedFont>
       <p:font typeface="JetBrains Mono"/>
-      <p:regular xmlns:r="http://schemas.openxmlformats.org/officeDocument/2006/relationships" r:id="Rd5b4d74466cc41af"/>
+      <p:regular xmlns:r="http://schemas.openxmlformats.org/officeDocument/2006/relationships" r:id="Reb4ea66b67ea4984"/>
     </p:embeddedFont>
   </p:embeddedFontLst>
 </p:presentation>
@@ -1071,7 +1071,7 @@
           <p:nvPr/>
         </p:nvPicPr>
         <p:blipFill rotWithShape="1">
-          <a:blip xmlns:r="http://schemas.openxmlformats.org/officeDocument/2006/relationships" xmlns:a="http://schemas.openxmlformats.org/drawingml/2006/main" r:embed="R3e5ad0e7008644d2"/>
+          <a:blip xmlns:r="http://schemas.openxmlformats.org/officeDocument/2006/relationships" xmlns:a="http://schemas.openxmlformats.org/drawingml/2006/main" r:embed="R5b10f5fef6eb4129"/>
           <a:stretch xmlns:a="http://schemas.openxmlformats.org/drawingml/2006/main"/>
         </p:blipFill>
         <p:spPr>
@@ -1451,7 +1451,7 @@
           <p:nvPr/>
         </p:nvPicPr>
         <p:blipFill rotWithShape="1">
-          <a:blip xmlns:r="http://schemas.openxmlformats.org/officeDocument/2006/relationships" xmlns:a="http://schemas.openxmlformats.org/drawingml/2006/main" r:embed="R052e84e5a6114075">
+          <a:blip xmlns:r="http://schemas.openxmlformats.org/officeDocument/2006/relationships" xmlns:a="http://schemas.openxmlformats.org/drawingml/2006/main" r:embed="R17ced96f07dd49ba">
             <a:alphaModFix amt="28000"/>
           </a:blip>
           <a:stretch xmlns:a="http://schemas.openxmlformats.org/drawingml/2006/main"/>
@@ -1664,7 +1664,7 @@
           <p:nvPr/>
         </p:nvPicPr>
         <p:blipFill rotWithShape="1">
-          <a:blip xmlns:r="http://schemas.openxmlformats.org/officeDocument/2006/relationships" xmlns:a="http://schemas.openxmlformats.org/drawingml/2006/main" r:embed="Re64b2b5b6008467c">
+          <a:blip xmlns:r="http://schemas.openxmlformats.org/officeDocument/2006/relationships" xmlns:a="http://schemas.openxmlformats.org/drawingml/2006/main" r:embed="R121a9d1455bb4a9c">
             <a:alphaModFix amt="28000"/>
           </a:blip>
           <a:stretch xmlns:a="http://schemas.openxmlformats.org/drawingml/2006/main"/>
@@ -1899,7 +1899,7 @@
           <p:nvPr/>
         </p:nvPicPr>
         <p:blipFill rotWithShape="1">
-          <a:blip xmlns:r="http://schemas.openxmlformats.org/officeDocument/2006/relationships" xmlns:a="http://schemas.openxmlformats.org/drawingml/2006/main" r:embed="R147045f61e454781">
+          <a:blip xmlns:r="http://schemas.openxmlformats.org/officeDocument/2006/relationships" xmlns:a="http://schemas.openxmlformats.org/drawingml/2006/main" r:embed="Rd33489cae1594998">
             <a:alphaModFix amt="28000"/>
           </a:blip>
           <a:stretch xmlns:a="http://schemas.openxmlformats.org/drawingml/2006/main"/>
@@ -2176,7 +2176,7 @@
           <p:nvPr/>
         </p:nvPicPr>
         <p:blipFill rotWithShape="1">
-          <a:blip xmlns:r="http://schemas.openxmlformats.org/officeDocument/2006/relationships" xmlns:a="http://schemas.openxmlformats.org/drawingml/2006/main" r:embed="R3a44064e7abb4afb">
+          <a:blip xmlns:r="http://schemas.openxmlformats.org/officeDocument/2006/relationships" xmlns:a="http://schemas.openxmlformats.org/drawingml/2006/main" r:embed="R8a93c3d018704492">
             <a:alphaModFix amt="28000"/>
           </a:blip>
           <a:stretch xmlns:a="http://schemas.openxmlformats.org/drawingml/2006/main"/>
@@ -2451,7 +2451,7 @@
           <p:nvPr/>
         </p:nvPicPr>
         <p:blipFill rotWithShape="1">
-          <a:blip xmlns:r="http://schemas.openxmlformats.org/officeDocument/2006/relationships" xmlns:a="http://schemas.openxmlformats.org/drawingml/2006/main" r:embed="Rb11a351602f845ca">
+          <a:blip xmlns:r="http://schemas.openxmlformats.org/officeDocument/2006/relationships" xmlns:a="http://schemas.openxmlformats.org/drawingml/2006/main" r:embed="R9f3a62b8a2ec46d0">
             <a:alphaModFix amt="28000"/>
           </a:blip>
           <a:stretch xmlns:a="http://schemas.openxmlformats.org/drawingml/2006/main"/>
@@ -2875,7 +2875,7 @@
           <p:nvPr/>
         </p:nvPicPr>
         <p:blipFill rotWithShape="1">
-          <a:blip xmlns:r="http://schemas.openxmlformats.org/officeDocument/2006/relationships" xmlns:a="http://schemas.openxmlformats.org/drawingml/2006/main" r:embed="R2dd06b60cc754bcd">
+          <a:blip xmlns:r="http://schemas.openxmlformats.org/officeDocument/2006/relationships" xmlns:a="http://schemas.openxmlformats.org/drawingml/2006/main" r:embed="R803e5aa25c234a07">
             <a:alphaModFix amt="28000"/>
           </a:blip>
           <a:stretch xmlns:a="http://schemas.openxmlformats.org/drawingml/2006/main"/>
@@ -3016,7 +3016,7 @@
           <p:nvPr/>
         </p:nvPicPr>
         <p:blipFill rotWithShape="1">
-          <a:blip xmlns:r="http://schemas.openxmlformats.org/officeDocument/2006/relationships" xmlns:a="http://schemas.openxmlformats.org/drawingml/2006/main" r:embed="R6304f51cd2a74d99">
+          <a:blip xmlns:r="http://schemas.openxmlformats.org/officeDocument/2006/relationships" xmlns:a="http://schemas.openxmlformats.org/drawingml/2006/main" r:embed="Rc7be4416d3f64b79">
             <a:alphaModFix amt="28000"/>
           </a:blip>
           <a:stretch xmlns:a="http://schemas.openxmlformats.org/drawingml/2006/main"/>
@@ -3130,7 +3130,7 @@
           <p:nvPr/>
         </p:nvPicPr>
         <p:blipFill rotWithShape="1">
-          <a:blip xmlns:r="http://schemas.openxmlformats.org/officeDocument/2006/relationships" xmlns:a="http://schemas.openxmlformats.org/drawingml/2006/main" r:embed="Rf1e8487ad4ed4f17">
+          <a:blip xmlns:r="http://schemas.openxmlformats.org/officeDocument/2006/relationships" xmlns:a="http://schemas.openxmlformats.org/drawingml/2006/main" r:embed="Rde0990d8e9fd4cb5">
             <a:alphaModFix amt="28000"/>
           </a:blip>
           <a:stretch xmlns:a="http://schemas.openxmlformats.org/drawingml/2006/main"/>
@@ -3457,7 +3457,7 @@
           <p:nvPr/>
         </p:nvPicPr>
         <p:blipFill rotWithShape="1">
-          <a:blip xmlns:r="http://schemas.openxmlformats.org/officeDocument/2006/relationships" xmlns:a="http://schemas.openxmlformats.org/drawingml/2006/main" r:embed="Rfd455903644d450c">
+          <a:blip xmlns:r="http://schemas.openxmlformats.org/officeDocument/2006/relationships" xmlns:a="http://schemas.openxmlformats.org/drawingml/2006/main" r:embed="Ra44b07b2ff154b2e">
             <a:alphaModFix amt="28000"/>
           </a:blip>
           <a:stretch xmlns:a="http://schemas.openxmlformats.org/drawingml/2006/main"/>
@@ -3745,7 +3745,7 @@
           <p:nvPr/>
         </p:nvPicPr>
         <p:blipFill rotWithShape="1">
-          <a:blip xmlns:r="http://schemas.openxmlformats.org/officeDocument/2006/relationships" xmlns:a="http://schemas.openxmlformats.org/drawingml/2006/main" r:embed="Rfe574800f1b342ec">
+          <a:blip xmlns:r="http://schemas.openxmlformats.org/officeDocument/2006/relationships" xmlns:a="http://schemas.openxmlformats.org/drawingml/2006/main" r:embed="R6baf06884b6340e9">
             <a:alphaModFix amt="28000"/>
           </a:blip>
           <a:stretch xmlns:a="http://schemas.openxmlformats.org/drawingml/2006/main"/>
@@ -3982,17 +3982,17 @@
   </p:cSld>
   <p:clrMap bg1="lt1" tx1="dk1" bg2="lt2" tx2="dk2" accent1="accent1" accent2="accent2" accent3="accent3" accent4="accent4" accent5="accent5" accent6="accent6" hlink="hlink" folHlink="folHlink"/>
   <p:sldLayoutIdLst>
-    <p:sldLayoutId xmlns:r="http://schemas.openxmlformats.org/officeDocument/2006/relationships" id="2147483649" r:id="R0d96cf91ee17417f"/>
-    <p:sldLayoutId xmlns:r="http://schemas.openxmlformats.org/officeDocument/2006/relationships" id="2147483650" r:id="Rfec5824ad5c849f6"/>
-    <p:sldLayoutId xmlns:r="http://schemas.openxmlformats.org/officeDocument/2006/relationships" id="2147483651" r:id="Rc7b34f816c6b4d31"/>
-    <p:sldLayoutId xmlns:r="http://schemas.openxmlformats.org/officeDocument/2006/relationships" id="2147483652" r:id="R071185eedad94444"/>
-    <p:sldLayoutId xmlns:r="http://schemas.openxmlformats.org/officeDocument/2006/relationships" id="2147483653" r:id="Rb72c100f99714e82"/>
-    <p:sldLayoutId xmlns:r="http://schemas.openxmlformats.org/officeDocument/2006/relationships" id="2147483654" r:id="Rea749b5072124e34"/>
-    <p:sldLayoutId xmlns:r="http://schemas.openxmlformats.org/officeDocument/2006/relationships" id="2147483655" r:id="R6d239363c6cc452c"/>
-    <p:sldLayoutId xmlns:r="http://schemas.openxmlformats.org/officeDocument/2006/relationships" id="2147483656" r:id="R7ffabef58a06420a"/>
-    <p:sldLayoutId xmlns:r="http://schemas.openxmlformats.org/officeDocument/2006/relationships" id="2147483657" r:id="R776e50c0c1854bf7"/>
-    <p:sldLayoutId xmlns:r="http://schemas.openxmlformats.org/officeDocument/2006/relationships" id="2147483658" r:id="R33b1cd6c30ce4e2a"/>
-    <p:sldLayoutId xmlns:r="http://schemas.openxmlformats.org/officeDocument/2006/relationships" id="2147483659" r:id="Rfaf62a80e8ea4b25"/>
+    <p:sldLayoutId xmlns:r="http://schemas.openxmlformats.org/officeDocument/2006/relationships" id="2147483649" r:id="Rf216f01416864c7e"/>
+    <p:sldLayoutId xmlns:r="http://schemas.openxmlformats.org/officeDocument/2006/relationships" id="2147483650" r:id="Rc9d4dd9afedf4d9b"/>
+    <p:sldLayoutId xmlns:r="http://schemas.openxmlformats.org/officeDocument/2006/relationships" id="2147483651" r:id="R2677b6d1dc4045ec"/>
+    <p:sldLayoutId xmlns:r="http://schemas.openxmlformats.org/officeDocument/2006/relationships" id="2147483652" r:id="R2aeb37989e0f4507"/>
+    <p:sldLayoutId xmlns:r="http://schemas.openxmlformats.org/officeDocument/2006/relationships" id="2147483653" r:id="R83094d26a7e64c8c"/>
+    <p:sldLayoutId xmlns:r="http://schemas.openxmlformats.org/officeDocument/2006/relationships" id="2147483654" r:id="R446ff2fba0734ff0"/>
+    <p:sldLayoutId xmlns:r="http://schemas.openxmlformats.org/officeDocument/2006/relationships" id="2147483655" r:id="Re6d2e0adec24411a"/>
+    <p:sldLayoutId xmlns:r="http://schemas.openxmlformats.org/officeDocument/2006/relationships" id="2147483656" r:id="Ref9594ec47e947c4"/>
+    <p:sldLayoutId xmlns:r="http://schemas.openxmlformats.org/officeDocument/2006/relationships" id="2147483657" r:id="R98dc39c438014cfe"/>
+    <p:sldLayoutId xmlns:r="http://schemas.openxmlformats.org/officeDocument/2006/relationships" id="2147483658" r:id="Rbe3c1efd8ece49ab"/>
+    <p:sldLayoutId xmlns:r="http://schemas.openxmlformats.org/officeDocument/2006/relationships" id="2147483659" r:id="Rcab2ed2e576b4081"/>
   </p:sldLayoutIdLst>
   <p:hf hdr="0" ftr="0" dt="0"/>
   <p:txStyles>
